--- a/Mapped Curriculum Lessons/Grade 8/Lesson 33 - Functions with Results/Functions with Results - Slides.pptx
+++ b/Mapped Curriculum Lessons/Grade 8/Lesson 33 - Functions with Results/Functions with Results - Slides.pptx
@@ -2,28 +2,28 @@
 <file path=ppt/presentation.xml><?xml version="1.0" encoding="utf-8"?>
 <p:presentation xmlns:p="http://schemas.openxmlformats.org/presentationml/2006/main" embedTrueTypeFonts="1" saveSubsetFonts="0">
   <p:sldMasterIdLst>
-    <p:sldMasterId xmlns:r="http://schemas.openxmlformats.org/officeDocument/2006/relationships" id="2147483648" r:id="R80d15104b323493f"/>
+    <p:sldMasterId xmlns:r="http://schemas.openxmlformats.org/officeDocument/2006/relationships" id="2147483648" r:id="R1890b4a89ebe448b"/>
   </p:sldMasterIdLst>
   <p:notesMasterIdLst>
-    <p:notesMasterId xmlns:r="http://schemas.openxmlformats.org/officeDocument/2006/relationships" r:id="R26e0abf5f7084a1e"/>
+    <p:notesMasterId xmlns:r="http://schemas.openxmlformats.org/officeDocument/2006/relationships" r:id="R1dda4b77e7e84842"/>
   </p:notesMasterIdLst>
   <p:sldIdLst>
-    <p:sldId xmlns:r="http://schemas.openxmlformats.org/officeDocument/2006/relationships" id="256" r:id="R19db17c6eda249c5"/>
-    <p:sldId xmlns:r="http://schemas.openxmlformats.org/officeDocument/2006/relationships" id="257" r:id="R5bb9051b11674c95"/>
-    <p:sldId xmlns:r="http://schemas.openxmlformats.org/officeDocument/2006/relationships" id="258" r:id="R2db6bd7bda3f4f95"/>
-    <p:sldId xmlns:r="http://schemas.openxmlformats.org/officeDocument/2006/relationships" id="259" r:id="R44f2c1988b7d4222"/>
-    <p:sldId xmlns:r="http://schemas.openxmlformats.org/officeDocument/2006/relationships" id="260" r:id="R7e8ecf91dd1d4d51"/>
-    <p:sldId xmlns:r="http://schemas.openxmlformats.org/officeDocument/2006/relationships" id="261" r:id="R14d871f034c44676"/>
-    <p:sldId xmlns:r="http://schemas.openxmlformats.org/officeDocument/2006/relationships" id="262" r:id="R5a1ee83c57654937"/>
-    <p:sldId xmlns:r="http://schemas.openxmlformats.org/officeDocument/2006/relationships" id="263" r:id="R8a62f5c7f07541c0"/>
-    <p:sldId xmlns:r="http://schemas.openxmlformats.org/officeDocument/2006/relationships" id="264" r:id="R4788532554234556"/>
+    <p:sldId xmlns:r="http://schemas.openxmlformats.org/officeDocument/2006/relationships" id="256" r:id="R82396754963843da"/>
+    <p:sldId xmlns:r="http://schemas.openxmlformats.org/officeDocument/2006/relationships" id="257" r:id="R11ae187644434a78"/>
+    <p:sldId xmlns:r="http://schemas.openxmlformats.org/officeDocument/2006/relationships" id="258" r:id="Re1261377167345d9"/>
+    <p:sldId xmlns:r="http://schemas.openxmlformats.org/officeDocument/2006/relationships" id="259" r:id="R438be3a68d484278"/>
+    <p:sldId xmlns:r="http://schemas.openxmlformats.org/officeDocument/2006/relationships" id="260" r:id="Re92838c46d4649ff"/>
+    <p:sldId xmlns:r="http://schemas.openxmlformats.org/officeDocument/2006/relationships" id="261" r:id="Rb5175652010e4eb4"/>
+    <p:sldId xmlns:r="http://schemas.openxmlformats.org/officeDocument/2006/relationships" id="262" r:id="R45eb0a9ca3e64631"/>
+    <p:sldId xmlns:r="http://schemas.openxmlformats.org/officeDocument/2006/relationships" id="263" r:id="Rdea9a4a832e24d57"/>
+    <p:sldId xmlns:r="http://schemas.openxmlformats.org/officeDocument/2006/relationships" id="264" r:id="R5f20b37f7c0d46b1"/>
   </p:sldIdLst>
   <p:sldSz cx="12192000" cy="6858000"/>
   <p:notesSz cx="6858000" cy="9144000"/>
   <p:embeddedFontLst>
     <p:embeddedFont>
       <p:font typeface="JetBrains Mono"/>
-      <p:regular xmlns:r="http://schemas.openxmlformats.org/officeDocument/2006/relationships" r:id="R706ab975547f49b9"/>
+      <p:regular xmlns:r="http://schemas.openxmlformats.org/officeDocument/2006/relationships" r:id="Rc4d776bfc06f4065"/>
     </p:embeddedFont>
   </p:embeddedFontLst>
 </p:presentation>
@@ -1071,7 +1071,7 @@
           <p:nvPr/>
         </p:nvPicPr>
         <p:blipFill rotWithShape="1">
-          <a:blip xmlns:r="http://schemas.openxmlformats.org/officeDocument/2006/relationships" xmlns:a="http://schemas.openxmlformats.org/drawingml/2006/main" r:embed="R433bcb5f71f548cc"/>
+          <a:blip xmlns:r="http://schemas.openxmlformats.org/officeDocument/2006/relationships" xmlns:a="http://schemas.openxmlformats.org/drawingml/2006/main" r:embed="Rce3e53592e5e47ec"/>
           <a:stretch xmlns:a="http://schemas.openxmlformats.org/drawingml/2006/main"/>
         </p:blipFill>
         <p:spPr>
@@ -1451,7 +1451,7 @@
           <p:nvPr/>
         </p:nvPicPr>
         <p:blipFill rotWithShape="1">
-          <a:blip xmlns:r="http://schemas.openxmlformats.org/officeDocument/2006/relationships" xmlns:a="http://schemas.openxmlformats.org/drawingml/2006/main" r:embed="Rf769a3646299418e">
+          <a:blip xmlns:r="http://schemas.openxmlformats.org/officeDocument/2006/relationships" xmlns:a="http://schemas.openxmlformats.org/drawingml/2006/main" r:embed="Reabf5c711d8a4810">
             <a:alphaModFix amt="28000"/>
           </a:blip>
           <a:stretch xmlns:a="http://schemas.openxmlformats.org/drawingml/2006/main"/>
@@ -1664,7 +1664,7 @@
           <p:nvPr/>
         </p:nvPicPr>
         <p:blipFill rotWithShape="1">
-          <a:blip xmlns:r="http://schemas.openxmlformats.org/officeDocument/2006/relationships" xmlns:a="http://schemas.openxmlformats.org/drawingml/2006/main" r:embed="R1bb4e439157e49b4">
+          <a:blip xmlns:r="http://schemas.openxmlformats.org/officeDocument/2006/relationships" xmlns:a="http://schemas.openxmlformats.org/drawingml/2006/main" r:embed="R0423dfecb1714be4">
             <a:alphaModFix amt="28000"/>
           </a:blip>
           <a:stretch xmlns:a="http://schemas.openxmlformats.org/drawingml/2006/main"/>
@@ -1899,7 +1899,7 @@
           <p:nvPr/>
         </p:nvPicPr>
         <p:blipFill rotWithShape="1">
-          <a:blip xmlns:r="http://schemas.openxmlformats.org/officeDocument/2006/relationships" xmlns:a="http://schemas.openxmlformats.org/drawingml/2006/main" r:embed="R74f6100797ae4809">
+          <a:blip xmlns:r="http://schemas.openxmlformats.org/officeDocument/2006/relationships" xmlns:a="http://schemas.openxmlformats.org/drawingml/2006/main" r:embed="Re3974bd8916d40d1">
             <a:alphaModFix amt="28000"/>
           </a:blip>
           <a:stretch xmlns:a="http://schemas.openxmlformats.org/drawingml/2006/main"/>
@@ -2176,7 +2176,7 @@
           <p:nvPr/>
         </p:nvPicPr>
         <p:blipFill rotWithShape="1">
-          <a:blip xmlns:r="http://schemas.openxmlformats.org/officeDocument/2006/relationships" xmlns:a="http://schemas.openxmlformats.org/drawingml/2006/main" r:embed="R08935583d3c14b4e">
+          <a:blip xmlns:r="http://schemas.openxmlformats.org/officeDocument/2006/relationships" xmlns:a="http://schemas.openxmlformats.org/drawingml/2006/main" r:embed="Re89f6422730f494a">
             <a:alphaModFix amt="28000"/>
           </a:blip>
           <a:stretch xmlns:a="http://schemas.openxmlformats.org/drawingml/2006/main"/>
@@ -2451,7 +2451,7 @@
           <p:nvPr/>
         </p:nvPicPr>
         <p:blipFill rotWithShape="1">
-          <a:blip xmlns:r="http://schemas.openxmlformats.org/officeDocument/2006/relationships" xmlns:a="http://schemas.openxmlformats.org/drawingml/2006/main" r:embed="Ra383387d4b0247d4">
+          <a:blip xmlns:r="http://schemas.openxmlformats.org/officeDocument/2006/relationships" xmlns:a="http://schemas.openxmlformats.org/drawingml/2006/main" r:embed="R45662e6894c3451f">
             <a:alphaModFix amt="28000"/>
           </a:blip>
           <a:stretch xmlns:a="http://schemas.openxmlformats.org/drawingml/2006/main"/>
@@ -2875,7 +2875,7 @@
           <p:nvPr/>
         </p:nvPicPr>
         <p:blipFill rotWithShape="1">
-          <a:blip xmlns:r="http://schemas.openxmlformats.org/officeDocument/2006/relationships" xmlns:a="http://schemas.openxmlformats.org/drawingml/2006/main" r:embed="R9054c468864f4bc6">
+          <a:blip xmlns:r="http://schemas.openxmlformats.org/officeDocument/2006/relationships" xmlns:a="http://schemas.openxmlformats.org/drawingml/2006/main" r:embed="R69f872978eb3441d">
             <a:alphaModFix amt="28000"/>
           </a:blip>
           <a:stretch xmlns:a="http://schemas.openxmlformats.org/drawingml/2006/main"/>
@@ -3016,7 +3016,7 @@
           <p:nvPr/>
         </p:nvPicPr>
         <p:blipFill rotWithShape="1">
-          <a:blip xmlns:r="http://schemas.openxmlformats.org/officeDocument/2006/relationships" xmlns:a="http://schemas.openxmlformats.org/drawingml/2006/main" r:embed="R8da1aa8c41cf4710">
+          <a:blip xmlns:r="http://schemas.openxmlformats.org/officeDocument/2006/relationships" xmlns:a="http://schemas.openxmlformats.org/drawingml/2006/main" r:embed="Rec9a22b8351f4778">
             <a:alphaModFix amt="28000"/>
           </a:blip>
           <a:stretch xmlns:a="http://schemas.openxmlformats.org/drawingml/2006/main"/>
@@ -3130,7 +3130,7 @@
           <p:nvPr/>
         </p:nvPicPr>
         <p:blipFill rotWithShape="1">
-          <a:blip xmlns:r="http://schemas.openxmlformats.org/officeDocument/2006/relationships" xmlns:a="http://schemas.openxmlformats.org/drawingml/2006/main" r:embed="R3b9bcd77ccfc4ae8">
+          <a:blip xmlns:r="http://schemas.openxmlformats.org/officeDocument/2006/relationships" xmlns:a="http://schemas.openxmlformats.org/drawingml/2006/main" r:embed="R337fdfd05917440a">
             <a:alphaModFix amt="28000"/>
           </a:blip>
           <a:stretch xmlns:a="http://schemas.openxmlformats.org/drawingml/2006/main"/>
@@ -3457,7 +3457,7 @@
           <p:nvPr/>
         </p:nvPicPr>
         <p:blipFill rotWithShape="1">
-          <a:blip xmlns:r="http://schemas.openxmlformats.org/officeDocument/2006/relationships" xmlns:a="http://schemas.openxmlformats.org/drawingml/2006/main" r:embed="Re10fc92e4d8d4f98">
+          <a:blip xmlns:r="http://schemas.openxmlformats.org/officeDocument/2006/relationships" xmlns:a="http://schemas.openxmlformats.org/drawingml/2006/main" r:embed="Rf86093d2704c49e5">
             <a:alphaModFix amt="28000"/>
           </a:blip>
           <a:stretch xmlns:a="http://schemas.openxmlformats.org/drawingml/2006/main"/>
@@ -3745,7 +3745,7 @@
           <p:nvPr/>
         </p:nvPicPr>
         <p:blipFill rotWithShape="1">
-          <a:blip xmlns:r="http://schemas.openxmlformats.org/officeDocument/2006/relationships" xmlns:a="http://schemas.openxmlformats.org/drawingml/2006/main" r:embed="Ra4eeaf6f59834a00">
+          <a:blip xmlns:r="http://schemas.openxmlformats.org/officeDocument/2006/relationships" xmlns:a="http://schemas.openxmlformats.org/drawingml/2006/main" r:embed="R05abc49f3f304969">
             <a:alphaModFix amt="28000"/>
           </a:blip>
           <a:stretch xmlns:a="http://schemas.openxmlformats.org/drawingml/2006/main"/>
@@ -3982,17 +3982,17 @@
   </p:cSld>
   <p:clrMap bg1="lt1" tx1="dk1" bg2="lt2" tx2="dk2" accent1="accent1" accent2="accent2" accent3="accent3" accent4="accent4" accent5="accent5" accent6="accent6" hlink="hlink" folHlink="folHlink"/>
   <p:sldLayoutIdLst>
-    <p:sldLayoutId xmlns:r="http://schemas.openxmlformats.org/officeDocument/2006/relationships" id="2147483649" r:id="Recd1ad41809845dc"/>
-    <p:sldLayoutId xmlns:r="http://schemas.openxmlformats.org/officeDocument/2006/relationships" id="2147483650" r:id="Rae92b394ca85440a"/>
-    <p:sldLayoutId xmlns:r="http://schemas.openxmlformats.org/officeDocument/2006/relationships" id="2147483651" r:id="Rb2e1186ab7834082"/>
-    <p:sldLayoutId xmlns:r="http://schemas.openxmlformats.org/officeDocument/2006/relationships" id="2147483652" r:id="Rbb6c86b547d544bb"/>
-    <p:sldLayoutId xmlns:r="http://schemas.openxmlformats.org/officeDocument/2006/relationships" id="2147483653" r:id="R56b311659cf6452a"/>
-    <p:sldLayoutId xmlns:r="http://schemas.openxmlformats.org/officeDocument/2006/relationships" id="2147483654" r:id="R5768dfb2f7ba4d1e"/>
-    <p:sldLayoutId xmlns:r="http://schemas.openxmlformats.org/officeDocument/2006/relationships" id="2147483655" r:id="R4105c4265e314ac9"/>
-    <p:sldLayoutId xmlns:r="http://schemas.openxmlformats.org/officeDocument/2006/relationships" id="2147483656" r:id="Raf541ae82eae44aa"/>
-    <p:sldLayoutId xmlns:r="http://schemas.openxmlformats.org/officeDocument/2006/relationships" id="2147483657" r:id="R75784b025b6242da"/>
-    <p:sldLayoutId xmlns:r="http://schemas.openxmlformats.org/officeDocument/2006/relationships" id="2147483658" r:id="R5cd9188affd94feb"/>
-    <p:sldLayoutId xmlns:r="http://schemas.openxmlformats.org/officeDocument/2006/relationships" id="2147483659" r:id="R0a4b57cb6f424e0d"/>
+    <p:sldLayoutId xmlns:r="http://schemas.openxmlformats.org/officeDocument/2006/relationships" id="2147483649" r:id="Rb77d5a1e1c0c4522"/>
+    <p:sldLayoutId xmlns:r="http://schemas.openxmlformats.org/officeDocument/2006/relationships" id="2147483650" r:id="R5f404f34f2774408"/>
+    <p:sldLayoutId xmlns:r="http://schemas.openxmlformats.org/officeDocument/2006/relationships" id="2147483651" r:id="R24320edbb7584786"/>
+    <p:sldLayoutId xmlns:r="http://schemas.openxmlformats.org/officeDocument/2006/relationships" id="2147483652" r:id="R0b3ee25837374725"/>
+    <p:sldLayoutId xmlns:r="http://schemas.openxmlformats.org/officeDocument/2006/relationships" id="2147483653" r:id="Rf0975ef270bb4ff8"/>
+    <p:sldLayoutId xmlns:r="http://schemas.openxmlformats.org/officeDocument/2006/relationships" id="2147483654" r:id="Rcec20db55a304c17"/>
+    <p:sldLayoutId xmlns:r="http://schemas.openxmlformats.org/officeDocument/2006/relationships" id="2147483655" r:id="Rbd66bbe175da4481"/>
+    <p:sldLayoutId xmlns:r="http://schemas.openxmlformats.org/officeDocument/2006/relationships" id="2147483656" r:id="R1f4f0d96983c4824"/>
+    <p:sldLayoutId xmlns:r="http://schemas.openxmlformats.org/officeDocument/2006/relationships" id="2147483657" r:id="R917653a6d30c4100"/>
+    <p:sldLayoutId xmlns:r="http://schemas.openxmlformats.org/officeDocument/2006/relationships" id="2147483658" r:id="R6a2d59eee8d14c70"/>
+    <p:sldLayoutId xmlns:r="http://schemas.openxmlformats.org/officeDocument/2006/relationships" id="2147483659" r:id="Rf2214258c78e4496"/>
   </p:sldLayoutIdLst>
   <p:hf hdr="0" ftr="0" dt="0"/>
   <p:txStyles>

--- a/Mapped Curriculum Lessons/Grade 8/Lesson 33 - Functions with Results/Functions with Results - Slides.pptx
+++ b/Mapped Curriculum Lessons/Grade 8/Lesson 33 - Functions with Results/Functions with Results - Slides.pptx
@@ -2,28 +2,28 @@
 <file path=ppt/presentation.xml><?xml version="1.0" encoding="utf-8"?>
 <p:presentation xmlns:p="http://schemas.openxmlformats.org/presentationml/2006/main" embedTrueTypeFonts="1" saveSubsetFonts="0">
   <p:sldMasterIdLst>
-    <p:sldMasterId xmlns:r="http://schemas.openxmlformats.org/officeDocument/2006/relationships" id="2147483648" r:id="R1890b4a89ebe448b"/>
+    <p:sldMasterId xmlns:r="http://schemas.openxmlformats.org/officeDocument/2006/relationships" id="2147483648" r:id="R9fb312447e634207"/>
   </p:sldMasterIdLst>
   <p:notesMasterIdLst>
-    <p:notesMasterId xmlns:r="http://schemas.openxmlformats.org/officeDocument/2006/relationships" r:id="R1dda4b77e7e84842"/>
+    <p:notesMasterId xmlns:r="http://schemas.openxmlformats.org/officeDocument/2006/relationships" r:id="Rf0d75d551c9540a5"/>
   </p:notesMasterIdLst>
   <p:sldIdLst>
-    <p:sldId xmlns:r="http://schemas.openxmlformats.org/officeDocument/2006/relationships" id="256" r:id="R82396754963843da"/>
-    <p:sldId xmlns:r="http://schemas.openxmlformats.org/officeDocument/2006/relationships" id="257" r:id="R11ae187644434a78"/>
-    <p:sldId xmlns:r="http://schemas.openxmlformats.org/officeDocument/2006/relationships" id="258" r:id="Re1261377167345d9"/>
-    <p:sldId xmlns:r="http://schemas.openxmlformats.org/officeDocument/2006/relationships" id="259" r:id="R438be3a68d484278"/>
-    <p:sldId xmlns:r="http://schemas.openxmlformats.org/officeDocument/2006/relationships" id="260" r:id="Re92838c46d4649ff"/>
-    <p:sldId xmlns:r="http://schemas.openxmlformats.org/officeDocument/2006/relationships" id="261" r:id="Rb5175652010e4eb4"/>
-    <p:sldId xmlns:r="http://schemas.openxmlformats.org/officeDocument/2006/relationships" id="262" r:id="R45eb0a9ca3e64631"/>
-    <p:sldId xmlns:r="http://schemas.openxmlformats.org/officeDocument/2006/relationships" id="263" r:id="Rdea9a4a832e24d57"/>
-    <p:sldId xmlns:r="http://schemas.openxmlformats.org/officeDocument/2006/relationships" id="264" r:id="R5f20b37f7c0d46b1"/>
+    <p:sldId xmlns:r="http://schemas.openxmlformats.org/officeDocument/2006/relationships" id="256" r:id="R3de301a1a19c4186"/>
+    <p:sldId xmlns:r="http://schemas.openxmlformats.org/officeDocument/2006/relationships" id="257" r:id="R8a7a32439a4048f5"/>
+    <p:sldId xmlns:r="http://schemas.openxmlformats.org/officeDocument/2006/relationships" id="258" r:id="Raf29a9ed010c41f6"/>
+    <p:sldId xmlns:r="http://schemas.openxmlformats.org/officeDocument/2006/relationships" id="259" r:id="R6b0d29bfee834ac7"/>
+    <p:sldId xmlns:r="http://schemas.openxmlformats.org/officeDocument/2006/relationships" id="260" r:id="R89caed9262674bba"/>
+    <p:sldId xmlns:r="http://schemas.openxmlformats.org/officeDocument/2006/relationships" id="261" r:id="R1e3084e3d29a4688"/>
+    <p:sldId xmlns:r="http://schemas.openxmlformats.org/officeDocument/2006/relationships" id="262" r:id="Rf8ca46bd84504af2"/>
+    <p:sldId xmlns:r="http://schemas.openxmlformats.org/officeDocument/2006/relationships" id="263" r:id="Rc5601a8964d94b60"/>
+    <p:sldId xmlns:r="http://schemas.openxmlformats.org/officeDocument/2006/relationships" id="264" r:id="R9e641a0092a94dc8"/>
   </p:sldIdLst>
   <p:sldSz cx="12192000" cy="6858000"/>
   <p:notesSz cx="6858000" cy="9144000"/>
   <p:embeddedFontLst>
     <p:embeddedFont>
       <p:font typeface="JetBrains Mono"/>
-      <p:regular xmlns:r="http://schemas.openxmlformats.org/officeDocument/2006/relationships" r:id="Rc4d776bfc06f4065"/>
+      <p:regular xmlns:r="http://schemas.openxmlformats.org/officeDocument/2006/relationships" r:id="R9a350ab14c034202"/>
     </p:embeddedFont>
   </p:embeddedFontLst>
 </p:presentation>
@@ -1071,7 +1071,7 @@
           <p:nvPr/>
         </p:nvPicPr>
         <p:blipFill rotWithShape="1">
-          <a:blip xmlns:r="http://schemas.openxmlformats.org/officeDocument/2006/relationships" xmlns:a="http://schemas.openxmlformats.org/drawingml/2006/main" r:embed="Rce3e53592e5e47ec"/>
+          <a:blip xmlns:r="http://schemas.openxmlformats.org/officeDocument/2006/relationships" xmlns:a="http://schemas.openxmlformats.org/drawingml/2006/main" r:embed="R1c8ec6e0911149cb"/>
           <a:stretch xmlns:a="http://schemas.openxmlformats.org/drawingml/2006/main"/>
         </p:blipFill>
         <p:spPr>
@@ -1451,7 +1451,7 @@
           <p:nvPr/>
         </p:nvPicPr>
         <p:blipFill rotWithShape="1">
-          <a:blip xmlns:r="http://schemas.openxmlformats.org/officeDocument/2006/relationships" xmlns:a="http://schemas.openxmlformats.org/drawingml/2006/main" r:embed="Reabf5c711d8a4810">
+          <a:blip xmlns:r="http://schemas.openxmlformats.org/officeDocument/2006/relationships" xmlns:a="http://schemas.openxmlformats.org/drawingml/2006/main" r:embed="Rac7750443bd64c6d">
             <a:alphaModFix amt="28000"/>
           </a:blip>
           <a:stretch xmlns:a="http://schemas.openxmlformats.org/drawingml/2006/main"/>
@@ -1664,7 +1664,7 @@
           <p:nvPr/>
         </p:nvPicPr>
         <p:blipFill rotWithShape="1">
-          <a:blip xmlns:r="http://schemas.openxmlformats.org/officeDocument/2006/relationships" xmlns:a="http://schemas.openxmlformats.org/drawingml/2006/main" r:embed="R0423dfecb1714be4">
+          <a:blip xmlns:r="http://schemas.openxmlformats.org/officeDocument/2006/relationships" xmlns:a="http://schemas.openxmlformats.org/drawingml/2006/main" r:embed="Raa900ecce2f74b67">
             <a:alphaModFix amt="28000"/>
           </a:blip>
           <a:stretch xmlns:a="http://schemas.openxmlformats.org/drawingml/2006/main"/>
@@ -1899,7 +1899,7 @@
           <p:nvPr/>
         </p:nvPicPr>
         <p:blipFill rotWithShape="1">
-          <a:blip xmlns:r="http://schemas.openxmlformats.org/officeDocument/2006/relationships" xmlns:a="http://schemas.openxmlformats.org/drawingml/2006/main" r:embed="Re3974bd8916d40d1">
+          <a:blip xmlns:r="http://schemas.openxmlformats.org/officeDocument/2006/relationships" xmlns:a="http://schemas.openxmlformats.org/drawingml/2006/main" r:embed="Rc6b139adfada459b">
             <a:alphaModFix amt="28000"/>
           </a:blip>
           <a:stretch xmlns:a="http://schemas.openxmlformats.org/drawingml/2006/main"/>
@@ -2176,7 +2176,7 @@
           <p:nvPr/>
         </p:nvPicPr>
         <p:blipFill rotWithShape="1">
-          <a:blip xmlns:r="http://schemas.openxmlformats.org/officeDocument/2006/relationships" xmlns:a="http://schemas.openxmlformats.org/drawingml/2006/main" r:embed="Re89f6422730f494a">
+          <a:blip xmlns:r="http://schemas.openxmlformats.org/officeDocument/2006/relationships" xmlns:a="http://schemas.openxmlformats.org/drawingml/2006/main" r:embed="Ra7b348895ef94cf1">
             <a:alphaModFix amt="28000"/>
           </a:blip>
           <a:stretch xmlns:a="http://schemas.openxmlformats.org/drawingml/2006/main"/>
@@ -2451,7 +2451,7 @@
           <p:nvPr/>
         </p:nvPicPr>
         <p:blipFill rotWithShape="1">
-          <a:blip xmlns:r="http://schemas.openxmlformats.org/officeDocument/2006/relationships" xmlns:a="http://schemas.openxmlformats.org/drawingml/2006/main" r:embed="R45662e6894c3451f">
+          <a:blip xmlns:r="http://schemas.openxmlformats.org/officeDocument/2006/relationships" xmlns:a="http://schemas.openxmlformats.org/drawingml/2006/main" r:embed="Rbea46db533a44ae8">
             <a:alphaModFix amt="28000"/>
           </a:blip>
           <a:stretch xmlns:a="http://schemas.openxmlformats.org/drawingml/2006/main"/>
@@ -2875,7 +2875,7 @@
           <p:nvPr/>
         </p:nvPicPr>
         <p:blipFill rotWithShape="1">
-          <a:blip xmlns:r="http://schemas.openxmlformats.org/officeDocument/2006/relationships" xmlns:a="http://schemas.openxmlformats.org/drawingml/2006/main" r:embed="R69f872978eb3441d">
+          <a:blip xmlns:r="http://schemas.openxmlformats.org/officeDocument/2006/relationships" xmlns:a="http://schemas.openxmlformats.org/drawingml/2006/main" r:embed="R8922d28435c4427b">
             <a:alphaModFix amt="28000"/>
           </a:blip>
           <a:stretch xmlns:a="http://schemas.openxmlformats.org/drawingml/2006/main"/>
@@ -3016,7 +3016,7 @@
           <p:nvPr/>
         </p:nvPicPr>
         <p:blipFill rotWithShape="1">
-          <a:blip xmlns:r="http://schemas.openxmlformats.org/officeDocument/2006/relationships" xmlns:a="http://schemas.openxmlformats.org/drawingml/2006/main" r:embed="Rec9a22b8351f4778">
+          <a:blip xmlns:r="http://schemas.openxmlformats.org/officeDocument/2006/relationships" xmlns:a="http://schemas.openxmlformats.org/drawingml/2006/main" r:embed="R11fec66c20444830">
             <a:alphaModFix amt="28000"/>
           </a:blip>
           <a:stretch xmlns:a="http://schemas.openxmlformats.org/drawingml/2006/main"/>
@@ -3130,7 +3130,7 @@
           <p:nvPr/>
         </p:nvPicPr>
         <p:blipFill rotWithShape="1">
-          <a:blip xmlns:r="http://schemas.openxmlformats.org/officeDocument/2006/relationships" xmlns:a="http://schemas.openxmlformats.org/drawingml/2006/main" r:embed="R337fdfd05917440a">
+          <a:blip xmlns:r="http://schemas.openxmlformats.org/officeDocument/2006/relationships" xmlns:a="http://schemas.openxmlformats.org/drawingml/2006/main" r:embed="R14c6ec73b62a42bb">
             <a:alphaModFix amt="28000"/>
           </a:blip>
           <a:stretch xmlns:a="http://schemas.openxmlformats.org/drawingml/2006/main"/>
@@ -3457,7 +3457,7 @@
           <p:nvPr/>
         </p:nvPicPr>
         <p:blipFill rotWithShape="1">
-          <a:blip xmlns:r="http://schemas.openxmlformats.org/officeDocument/2006/relationships" xmlns:a="http://schemas.openxmlformats.org/drawingml/2006/main" r:embed="Rf86093d2704c49e5">
+          <a:blip xmlns:r="http://schemas.openxmlformats.org/officeDocument/2006/relationships" xmlns:a="http://schemas.openxmlformats.org/drawingml/2006/main" r:embed="R3ea04a37b0bb411e">
             <a:alphaModFix amt="28000"/>
           </a:blip>
           <a:stretch xmlns:a="http://schemas.openxmlformats.org/drawingml/2006/main"/>
@@ -3745,7 +3745,7 @@
           <p:nvPr/>
         </p:nvPicPr>
         <p:blipFill rotWithShape="1">
-          <a:blip xmlns:r="http://schemas.openxmlformats.org/officeDocument/2006/relationships" xmlns:a="http://schemas.openxmlformats.org/drawingml/2006/main" r:embed="R05abc49f3f304969">
+          <a:blip xmlns:r="http://schemas.openxmlformats.org/officeDocument/2006/relationships" xmlns:a="http://schemas.openxmlformats.org/drawingml/2006/main" r:embed="R576f3071f0af4fb5">
             <a:alphaModFix amt="28000"/>
           </a:blip>
           <a:stretch xmlns:a="http://schemas.openxmlformats.org/drawingml/2006/main"/>
@@ -3982,17 +3982,17 @@
   </p:cSld>
   <p:clrMap bg1="lt1" tx1="dk1" bg2="lt2" tx2="dk2" accent1="accent1" accent2="accent2" accent3="accent3" accent4="accent4" accent5="accent5" accent6="accent6" hlink="hlink" folHlink="folHlink"/>
   <p:sldLayoutIdLst>
-    <p:sldLayoutId xmlns:r="http://schemas.openxmlformats.org/officeDocument/2006/relationships" id="2147483649" r:id="Rb77d5a1e1c0c4522"/>
-    <p:sldLayoutId xmlns:r="http://schemas.openxmlformats.org/officeDocument/2006/relationships" id="2147483650" r:id="R5f404f34f2774408"/>
-    <p:sldLayoutId xmlns:r="http://schemas.openxmlformats.org/officeDocument/2006/relationships" id="2147483651" r:id="R24320edbb7584786"/>
-    <p:sldLayoutId xmlns:r="http://schemas.openxmlformats.org/officeDocument/2006/relationships" id="2147483652" r:id="R0b3ee25837374725"/>
-    <p:sldLayoutId xmlns:r="http://schemas.openxmlformats.org/officeDocument/2006/relationships" id="2147483653" r:id="Rf0975ef270bb4ff8"/>
-    <p:sldLayoutId xmlns:r="http://schemas.openxmlformats.org/officeDocument/2006/relationships" id="2147483654" r:id="Rcec20db55a304c17"/>
-    <p:sldLayoutId xmlns:r="http://schemas.openxmlformats.org/officeDocument/2006/relationships" id="2147483655" r:id="Rbd66bbe175da4481"/>
-    <p:sldLayoutId xmlns:r="http://schemas.openxmlformats.org/officeDocument/2006/relationships" id="2147483656" r:id="R1f4f0d96983c4824"/>
-    <p:sldLayoutId xmlns:r="http://schemas.openxmlformats.org/officeDocument/2006/relationships" id="2147483657" r:id="R917653a6d30c4100"/>
-    <p:sldLayoutId xmlns:r="http://schemas.openxmlformats.org/officeDocument/2006/relationships" id="2147483658" r:id="R6a2d59eee8d14c70"/>
-    <p:sldLayoutId xmlns:r="http://schemas.openxmlformats.org/officeDocument/2006/relationships" id="2147483659" r:id="Rf2214258c78e4496"/>
+    <p:sldLayoutId xmlns:r="http://schemas.openxmlformats.org/officeDocument/2006/relationships" id="2147483649" r:id="R67d3aabac22e4180"/>
+    <p:sldLayoutId xmlns:r="http://schemas.openxmlformats.org/officeDocument/2006/relationships" id="2147483650" r:id="Rd5fede3bcc104628"/>
+    <p:sldLayoutId xmlns:r="http://schemas.openxmlformats.org/officeDocument/2006/relationships" id="2147483651" r:id="R904b276feacd4a33"/>
+    <p:sldLayoutId xmlns:r="http://schemas.openxmlformats.org/officeDocument/2006/relationships" id="2147483652" r:id="Rab73001053fb47a5"/>
+    <p:sldLayoutId xmlns:r="http://schemas.openxmlformats.org/officeDocument/2006/relationships" id="2147483653" r:id="R61c38de4f6ba4610"/>
+    <p:sldLayoutId xmlns:r="http://schemas.openxmlformats.org/officeDocument/2006/relationships" id="2147483654" r:id="R21fbbade04ae4e68"/>
+    <p:sldLayoutId xmlns:r="http://schemas.openxmlformats.org/officeDocument/2006/relationships" id="2147483655" r:id="R0f3f6cbf27474b82"/>
+    <p:sldLayoutId xmlns:r="http://schemas.openxmlformats.org/officeDocument/2006/relationships" id="2147483656" r:id="R15ce9c830e774a72"/>
+    <p:sldLayoutId xmlns:r="http://schemas.openxmlformats.org/officeDocument/2006/relationships" id="2147483657" r:id="R56e8b31fcd2441e6"/>
+    <p:sldLayoutId xmlns:r="http://schemas.openxmlformats.org/officeDocument/2006/relationships" id="2147483658" r:id="R922f3125175f46b5"/>
+    <p:sldLayoutId xmlns:r="http://schemas.openxmlformats.org/officeDocument/2006/relationships" id="2147483659" r:id="R1986892dac274071"/>
   </p:sldLayoutIdLst>
   <p:hf hdr="0" ftr="0" dt="0"/>
   <p:txStyles>

--- a/Mapped Curriculum Lessons/Grade 8/Lesson 33 - Functions with Results/Functions with Results - Slides.pptx
+++ b/Mapped Curriculum Lessons/Grade 8/Lesson 33 - Functions with Results/Functions with Results - Slides.pptx
@@ -2,28 +2,28 @@
 <file path=ppt/presentation.xml><?xml version="1.0" encoding="utf-8"?>
 <p:presentation xmlns:p="http://schemas.openxmlformats.org/presentationml/2006/main" embedTrueTypeFonts="1" saveSubsetFonts="0">
   <p:sldMasterIdLst>
-    <p:sldMasterId xmlns:r="http://schemas.openxmlformats.org/officeDocument/2006/relationships" id="2147483648" r:id="R9fb312447e634207"/>
+    <p:sldMasterId xmlns:r="http://schemas.openxmlformats.org/officeDocument/2006/relationships" id="2147483648" r:id="Rc98fb9335e0e43f4"/>
   </p:sldMasterIdLst>
   <p:notesMasterIdLst>
-    <p:notesMasterId xmlns:r="http://schemas.openxmlformats.org/officeDocument/2006/relationships" r:id="Rf0d75d551c9540a5"/>
+    <p:notesMasterId xmlns:r="http://schemas.openxmlformats.org/officeDocument/2006/relationships" r:id="Rac977b0e1e984f02"/>
   </p:notesMasterIdLst>
   <p:sldIdLst>
-    <p:sldId xmlns:r="http://schemas.openxmlformats.org/officeDocument/2006/relationships" id="256" r:id="R3de301a1a19c4186"/>
-    <p:sldId xmlns:r="http://schemas.openxmlformats.org/officeDocument/2006/relationships" id="257" r:id="R8a7a32439a4048f5"/>
-    <p:sldId xmlns:r="http://schemas.openxmlformats.org/officeDocument/2006/relationships" id="258" r:id="Raf29a9ed010c41f6"/>
-    <p:sldId xmlns:r="http://schemas.openxmlformats.org/officeDocument/2006/relationships" id="259" r:id="R6b0d29bfee834ac7"/>
-    <p:sldId xmlns:r="http://schemas.openxmlformats.org/officeDocument/2006/relationships" id="260" r:id="R89caed9262674bba"/>
-    <p:sldId xmlns:r="http://schemas.openxmlformats.org/officeDocument/2006/relationships" id="261" r:id="R1e3084e3d29a4688"/>
-    <p:sldId xmlns:r="http://schemas.openxmlformats.org/officeDocument/2006/relationships" id="262" r:id="Rf8ca46bd84504af2"/>
-    <p:sldId xmlns:r="http://schemas.openxmlformats.org/officeDocument/2006/relationships" id="263" r:id="Rc5601a8964d94b60"/>
-    <p:sldId xmlns:r="http://schemas.openxmlformats.org/officeDocument/2006/relationships" id="264" r:id="R9e641a0092a94dc8"/>
+    <p:sldId xmlns:r="http://schemas.openxmlformats.org/officeDocument/2006/relationships" id="256" r:id="Rc6ba949d446e4e49"/>
+    <p:sldId xmlns:r="http://schemas.openxmlformats.org/officeDocument/2006/relationships" id="257" r:id="R8c785fde1c2941c8"/>
+    <p:sldId xmlns:r="http://schemas.openxmlformats.org/officeDocument/2006/relationships" id="258" r:id="Rf045532161b94068"/>
+    <p:sldId xmlns:r="http://schemas.openxmlformats.org/officeDocument/2006/relationships" id="259" r:id="R3f49eccef1c943c0"/>
+    <p:sldId xmlns:r="http://schemas.openxmlformats.org/officeDocument/2006/relationships" id="260" r:id="Rdf7cec4782dc4f82"/>
+    <p:sldId xmlns:r="http://schemas.openxmlformats.org/officeDocument/2006/relationships" id="261" r:id="Ree1062f3d7204bf5"/>
+    <p:sldId xmlns:r="http://schemas.openxmlformats.org/officeDocument/2006/relationships" id="262" r:id="R91ce035436aa4e36"/>
+    <p:sldId xmlns:r="http://schemas.openxmlformats.org/officeDocument/2006/relationships" id="263" r:id="R22a57a98268744c0"/>
+    <p:sldId xmlns:r="http://schemas.openxmlformats.org/officeDocument/2006/relationships" id="264" r:id="R2fa820a89cce492f"/>
   </p:sldIdLst>
   <p:sldSz cx="12192000" cy="6858000"/>
   <p:notesSz cx="6858000" cy="9144000"/>
   <p:embeddedFontLst>
     <p:embeddedFont>
       <p:font typeface="JetBrains Mono"/>
-      <p:regular xmlns:r="http://schemas.openxmlformats.org/officeDocument/2006/relationships" r:id="R9a350ab14c034202"/>
+      <p:regular xmlns:r="http://schemas.openxmlformats.org/officeDocument/2006/relationships" r:id="Rcde8494ca1314943"/>
     </p:embeddedFont>
   </p:embeddedFontLst>
 </p:presentation>
@@ -1071,7 +1071,7 @@
           <p:nvPr/>
         </p:nvPicPr>
         <p:blipFill rotWithShape="1">
-          <a:blip xmlns:r="http://schemas.openxmlformats.org/officeDocument/2006/relationships" xmlns:a="http://schemas.openxmlformats.org/drawingml/2006/main" r:embed="R1c8ec6e0911149cb"/>
+          <a:blip xmlns:r="http://schemas.openxmlformats.org/officeDocument/2006/relationships" xmlns:a="http://schemas.openxmlformats.org/drawingml/2006/main" r:embed="R6d2f768c0deb4bce"/>
           <a:stretch xmlns:a="http://schemas.openxmlformats.org/drawingml/2006/main"/>
         </p:blipFill>
         <p:spPr>
@@ -1451,7 +1451,7 @@
           <p:nvPr/>
         </p:nvPicPr>
         <p:blipFill rotWithShape="1">
-          <a:blip xmlns:r="http://schemas.openxmlformats.org/officeDocument/2006/relationships" xmlns:a="http://schemas.openxmlformats.org/drawingml/2006/main" r:embed="Rac7750443bd64c6d">
+          <a:blip xmlns:r="http://schemas.openxmlformats.org/officeDocument/2006/relationships" xmlns:a="http://schemas.openxmlformats.org/drawingml/2006/main" r:embed="Re5378783b29d4b54">
             <a:alphaModFix amt="28000"/>
           </a:blip>
           <a:stretch xmlns:a="http://schemas.openxmlformats.org/drawingml/2006/main"/>
@@ -1664,7 +1664,7 @@
           <p:nvPr/>
         </p:nvPicPr>
         <p:blipFill rotWithShape="1">
-          <a:blip xmlns:r="http://schemas.openxmlformats.org/officeDocument/2006/relationships" xmlns:a="http://schemas.openxmlformats.org/drawingml/2006/main" r:embed="Raa900ecce2f74b67">
+          <a:blip xmlns:r="http://schemas.openxmlformats.org/officeDocument/2006/relationships" xmlns:a="http://schemas.openxmlformats.org/drawingml/2006/main" r:embed="R26f523176aa749d3">
             <a:alphaModFix amt="28000"/>
           </a:blip>
           <a:stretch xmlns:a="http://schemas.openxmlformats.org/drawingml/2006/main"/>
@@ -1899,7 +1899,7 @@
           <p:nvPr/>
         </p:nvPicPr>
         <p:blipFill rotWithShape="1">
-          <a:blip xmlns:r="http://schemas.openxmlformats.org/officeDocument/2006/relationships" xmlns:a="http://schemas.openxmlformats.org/drawingml/2006/main" r:embed="Rc6b139adfada459b">
+          <a:blip xmlns:r="http://schemas.openxmlformats.org/officeDocument/2006/relationships" xmlns:a="http://schemas.openxmlformats.org/drawingml/2006/main" r:embed="Rd75dc6ad951a425d">
             <a:alphaModFix amt="28000"/>
           </a:blip>
           <a:stretch xmlns:a="http://schemas.openxmlformats.org/drawingml/2006/main"/>
@@ -2176,7 +2176,7 @@
           <p:nvPr/>
         </p:nvPicPr>
         <p:blipFill rotWithShape="1">
-          <a:blip xmlns:r="http://schemas.openxmlformats.org/officeDocument/2006/relationships" xmlns:a="http://schemas.openxmlformats.org/drawingml/2006/main" r:embed="Ra7b348895ef94cf1">
+          <a:blip xmlns:r="http://schemas.openxmlformats.org/officeDocument/2006/relationships" xmlns:a="http://schemas.openxmlformats.org/drawingml/2006/main" r:embed="Rcb3c5201310c4b7a">
             <a:alphaModFix amt="28000"/>
           </a:blip>
           <a:stretch xmlns:a="http://schemas.openxmlformats.org/drawingml/2006/main"/>
@@ -2451,7 +2451,7 @@
           <p:nvPr/>
         </p:nvPicPr>
         <p:blipFill rotWithShape="1">
-          <a:blip xmlns:r="http://schemas.openxmlformats.org/officeDocument/2006/relationships" xmlns:a="http://schemas.openxmlformats.org/drawingml/2006/main" r:embed="Rbea46db533a44ae8">
+          <a:blip xmlns:r="http://schemas.openxmlformats.org/officeDocument/2006/relationships" xmlns:a="http://schemas.openxmlformats.org/drawingml/2006/main" r:embed="Radd09f5abdc54772">
             <a:alphaModFix amt="28000"/>
           </a:blip>
           <a:stretch xmlns:a="http://schemas.openxmlformats.org/drawingml/2006/main"/>
@@ -2875,7 +2875,7 @@
           <p:nvPr/>
         </p:nvPicPr>
         <p:blipFill rotWithShape="1">
-          <a:blip xmlns:r="http://schemas.openxmlformats.org/officeDocument/2006/relationships" xmlns:a="http://schemas.openxmlformats.org/drawingml/2006/main" r:embed="R8922d28435c4427b">
+          <a:blip xmlns:r="http://schemas.openxmlformats.org/officeDocument/2006/relationships" xmlns:a="http://schemas.openxmlformats.org/drawingml/2006/main" r:embed="R19bf6d4a52a3475b">
             <a:alphaModFix amt="28000"/>
           </a:blip>
           <a:stretch xmlns:a="http://schemas.openxmlformats.org/drawingml/2006/main"/>
@@ -3016,7 +3016,7 @@
           <p:nvPr/>
         </p:nvPicPr>
         <p:blipFill rotWithShape="1">
-          <a:blip xmlns:r="http://schemas.openxmlformats.org/officeDocument/2006/relationships" xmlns:a="http://schemas.openxmlformats.org/drawingml/2006/main" r:embed="R11fec66c20444830">
+          <a:blip xmlns:r="http://schemas.openxmlformats.org/officeDocument/2006/relationships" xmlns:a="http://schemas.openxmlformats.org/drawingml/2006/main" r:embed="Rb15bf8075dea4880">
             <a:alphaModFix amt="28000"/>
           </a:blip>
           <a:stretch xmlns:a="http://schemas.openxmlformats.org/drawingml/2006/main"/>
@@ -3130,7 +3130,7 @@
           <p:nvPr/>
         </p:nvPicPr>
         <p:blipFill rotWithShape="1">
-          <a:blip xmlns:r="http://schemas.openxmlformats.org/officeDocument/2006/relationships" xmlns:a="http://schemas.openxmlformats.org/drawingml/2006/main" r:embed="R14c6ec73b62a42bb">
+          <a:blip xmlns:r="http://schemas.openxmlformats.org/officeDocument/2006/relationships" xmlns:a="http://schemas.openxmlformats.org/drawingml/2006/main" r:embed="Rad11d1890def4154">
             <a:alphaModFix amt="28000"/>
           </a:blip>
           <a:stretch xmlns:a="http://schemas.openxmlformats.org/drawingml/2006/main"/>
@@ -3457,7 +3457,7 @@
           <p:nvPr/>
         </p:nvPicPr>
         <p:blipFill rotWithShape="1">
-          <a:blip xmlns:r="http://schemas.openxmlformats.org/officeDocument/2006/relationships" xmlns:a="http://schemas.openxmlformats.org/drawingml/2006/main" r:embed="R3ea04a37b0bb411e">
+          <a:blip xmlns:r="http://schemas.openxmlformats.org/officeDocument/2006/relationships" xmlns:a="http://schemas.openxmlformats.org/drawingml/2006/main" r:embed="R10319e77a59e421b">
             <a:alphaModFix amt="28000"/>
           </a:blip>
           <a:stretch xmlns:a="http://schemas.openxmlformats.org/drawingml/2006/main"/>
@@ -3745,7 +3745,7 @@
           <p:nvPr/>
         </p:nvPicPr>
         <p:blipFill rotWithShape="1">
-          <a:blip xmlns:r="http://schemas.openxmlformats.org/officeDocument/2006/relationships" xmlns:a="http://schemas.openxmlformats.org/drawingml/2006/main" r:embed="R576f3071f0af4fb5">
+          <a:blip xmlns:r="http://schemas.openxmlformats.org/officeDocument/2006/relationships" xmlns:a="http://schemas.openxmlformats.org/drawingml/2006/main" r:embed="R192fb48fc3ca4e3e">
             <a:alphaModFix amt="28000"/>
           </a:blip>
           <a:stretch xmlns:a="http://schemas.openxmlformats.org/drawingml/2006/main"/>
@@ -3982,17 +3982,17 @@
   </p:cSld>
   <p:clrMap bg1="lt1" tx1="dk1" bg2="lt2" tx2="dk2" accent1="accent1" accent2="accent2" accent3="accent3" accent4="accent4" accent5="accent5" accent6="accent6" hlink="hlink" folHlink="folHlink"/>
   <p:sldLayoutIdLst>
-    <p:sldLayoutId xmlns:r="http://schemas.openxmlformats.org/officeDocument/2006/relationships" id="2147483649" r:id="R67d3aabac22e4180"/>
-    <p:sldLayoutId xmlns:r="http://schemas.openxmlformats.org/officeDocument/2006/relationships" id="2147483650" r:id="Rd5fede3bcc104628"/>
-    <p:sldLayoutId xmlns:r="http://schemas.openxmlformats.org/officeDocument/2006/relationships" id="2147483651" r:id="R904b276feacd4a33"/>
-    <p:sldLayoutId xmlns:r="http://schemas.openxmlformats.org/officeDocument/2006/relationships" id="2147483652" r:id="Rab73001053fb47a5"/>
-    <p:sldLayoutId xmlns:r="http://schemas.openxmlformats.org/officeDocument/2006/relationships" id="2147483653" r:id="R61c38de4f6ba4610"/>
-    <p:sldLayoutId xmlns:r="http://schemas.openxmlformats.org/officeDocument/2006/relationships" id="2147483654" r:id="R21fbbade04ae4e68"/>
-    <p:sldLayoutId xmlns:r="http://schemas.openxmlformats.org/officeDocument/2006/relationships" id="2147483655" r:id="R0f3f6cbf27474b82"/>
-    <p:sldLayoutId xmlns:r="http://schemas.openxmlformats.org/officeDocument/2006/relationships" id="2147483656" r:id="R15ce9c830e774a72"/>
-    <p:sldLayoutId xmlns:r="http://schemas.openxmlformats.org/officeDocument/2006/relationships" id="2147483657" r:id="R56e8b31fcd2441e6"/>
-    <p:sldLayoutId xmlns:r="http://schemas.openxmlformats.org/officeDocument/2006/relationships" id="2147483658" r:id="R922f3125175f46b5"/>
-    <p:sldLayoutId xmlns:r="http://schemas.openxmlformats.org/officeDocument/2006/relationships" id="2147483659" r:id="R1986892dac274071"/>
+    <p:sldLayoutId xmlns:r="http://schemas.openxmlformats.org/officeDocument/2006/relationships" id="2147483649" r:id="Rb28906a2ec5b4495"/>
+    <p:sldLayoutId xmlns:r="http://schemas.openxmlformats.org/officeDocument/2006/relationships" id="2147483650" r:id="R1f0240773d9c409c"/>
+    <p:sldLayoutId xmlns:r="http://schemas.openxmlformats.org/officeDocument/2006/relationships" id="2147483651" r:id="R7660ccba6cc141d8"/>
+    <p:sldLayoutId xmlns:r="http://schemas.openxmlformats.org/officeDocument/2006/relationships" id="2147483652" r:id="Ref8fda9f6b2a45d2"/>
+    <p:sldLayoutId xmlns:r="http://schemas.openxmlformats.org/officeDocument/2006/relationships" id="2147483653" r:id="R449547355fac419c"/>
+    <p:sldLayoutId xmlns:r="http://schemas.openxmlformats.org/officeDocument/2006/relationships" id="2147483654" r:id="R5cc81961c77840b7"/>
+    <p:sldLayoutId xmlns:r="http://schemas.openxmlformats.org/officeDocument/2006/relationships" id="2147483655" r:id="R46e1bfb1116f49fb"/>
+    <p:sldLayoutId xmlns:r="http://schemas.openxmlformats.org/officeDocument/2006/relationships" id="2147483656" r:id="R93ceb96ef9b74303"/>
+    <p:sldLayoutId xmlns:r="http://schemas.openxmlformats.org/officeDocument/2006/relationships" id="2147483657" r:id="R162186b08a504811"/>
+    <p:sldLayoutId xmlns:r="http://schemas.openxmlformats.org/officeDocument/2006/relationships" id="2147483658" r:id="R9694fee68bc84978"/>
+    <p:sldLayoutId xmlns:r="http://schemas.openxmlformats.org/officeDocument/2006/relationships" id="2147483659" r:id="R39fcf473cb614002"/>
   </p:sldLayoutIdLst>
   <p:hf hdr="0" ftr="0" dt="0"/>
   <p:txStyles>
@@ -6645,7 +6645,73 @@
                 <a:ea typeface="Calibri"/>
                 <a:cs typeface="Calibri"/>
               </a:rPr>
-              <a:t>Use the same function with two different pairs of scores. Before each run, work out the total you expect, then compare it with the returned value.</a:t>
+              <a:t>Change the example so it calls </a:t>
+            </a:r>
+            <a:r>
+              <a:rPr sz="2050" b="0">
+                <a:solidFill>
+                  <a:srgbClr val="1750EB"/>
+                </a:solidFill>
+                <a:latin typeface="JetBrains Mono"/>
+                <a:ea typeface="JetBrains Mono"/>
+                <a:cs typeface="JetBrains Mono"/>
+              </a:rPr>
+              <a:t>add_score()</a:t>
+            </a:r>
+            <a:r>
+              <a:rPr sz="2400" b="0">
+                <a:solidFill>
+                  <a:srgbClr val="080808"/>
+                </a:solidFill>
+                <a:latin typeface="Calibri"/>
+                <a:ea typeface="Calibri"/>
+                <a:cs typeface="Calibri"/>
+              </a:rPr>
+              <a:t> twice: with 7 and 5, then with 10 and 8. Store the results and display them after </a:t>
+            </a:r>
+            <a:r>
+              <a:rPr sz="2050" b="0">
+                <a:solidFill>
+                  <a:srgbClr val="067D17"/>
+                </a:solidFill>
+                <a:latin typeface="JetBrains Mono"/>
+                <a:ea typeface="JetBrains Mono"/>
+                <a:cs typeface="JetBrains Mono"/>
+              </a:rPr>
+              <a:t>"First score:"</a:t>
+            </a:r>
+            <a:r>
+              <a:rPr sz="2400" b="0">
+                <a:solidFill>
+                  <a:srgbClr val="080808"/>
+                </a:solidFill>
+                <a:latin typeface="Calibri"/>
+                <a:ea typeface="Calibri"/>
+                <a:cs typeface="Calibri"/>
+              </a:rPr>
+              <a:t> and </a:t>
+            </a:r>
+            <a:r>
+              <a:rPr sz="2050" b="0">
+                <a:solidFill>
+                  <a:srgbClr val="067D17"/>
+                </a:solidFill>
+                <a:latin typeface="JetBrains Mono"/>
+                <a:ea typeface="JetBrains Mono"/>
+                <a:cs typeface="JetBrains Mono"/>
+              </a:rPr>
+              <a:t>"Second score:"</a:t>
+            </a:r>
+            <a:r>
+              <a:rPr sz="2400" b="0">
+                <a:solidFill>
+                  <a:srgbClr val="080808"/>
+                </a:solidFill>
+                <a:latin typeface="Calibri"/>
+                <a:ea typeface="Calibri"/>
+                <a:cs typeface="Calibri"/>
+              </a:rPr>
+              <a:t>. Work out the totals before you run it.</a:t>
             </a:r>
           </a:p>
         </p:txBody>
@@ -7160,7 +7226,117 @@
                 <a:ea typeface="Calibri"/>
                 <a:cs typeface="Calibri"/>
               </a:rPr>
-              <a:t>Capture the returned total in a variable named score and display a labelled result on the next line. The function itself should not print the answer.</a:t>
+              <a:t>Extend the example with a function called </a:t>
+            </a:r>
+            <a:r>
+              <a:rPr sz="2050" b="0">
+                <a:solidFill>
+                  <a:srgbClr val="1750EB"/>
+                </a:solidFill>
+                <a:latin typeface="JetBrains Mono"/>
+                <a:ea typeface="JetBrains Mono"/>
+                <a:cs typeface="JetBrains Mono"/>
+              </a:rPr>
+              <a:t>average_score</a:t>
+            </a:r>
+            <a:r>
+              <a:rPr sz="2400" b="0">
+                <a:solidFill>
+                  <a:srgbClr val="080808"/>
+                </a:solidFill>
+                <a:latin typeface="Calibri"/>
+                <a:ea typeface="Calibri"/>
+                <a:cs typeface="Calibri"/>
+              </a:rPr>
+              <a:t>(first, second) that will </a:t>
+            </a:r>
+            <a:r>
+              <a:rPr sz="2050" b="0">
+                <a:solidFill>
+                  <a:srgbClr val="1750EB"/>
+                </a:solidFill>
+                <a:latin typeface="JetBrains Mono"/>
+                <a:ea typeface="JetBrains Mono"/>
+                <a:cs typeface="JetBrains Mono"/>
+              </a:rPr>
+              <a:t>return</a:t>
+            </a:r>
+            <a:r>
+              <a:rPr sz="2400" b="0">
+                <a:solidFill>
+                  <a:srgbClr val="080808"/>
+                </a:solidFill>
+                <a:latin typeface="Calibri"/>
+                <a:ea typeface="Calibri"/>
+                <a:cs typeface="Calibri"/>
+              </a:rPr>
+              <a:t> the two values added together and divided by 2. After the score, display </a:t>
+            </a:r>
+            <a:r>
+              <a:rPr sz="2050" b="0">
+                <a:solidFill>
+                  <a:srgbClr val="067D17"/>
+                </a:solidFill>
+                <a:latin typeface="JetBrains Mono"/>
+                <a:ea typeface="JetBrains Mono"/>
+                <a:cs typeface="JetBrains Mono"/>
+              </a:rPr>
+              <a:t>"Average:"</a:t>
+            </a:r>
+            <a:r>
+              <a:rPr sz="2400" b="0">
+                <a:solidFill>
+                  <a:srgbClr val="080808"/>
+                </a:solidFill>
+                <a:latin typeface="Calibri"/>
+                <a:ea typeface="Calibri"/>
+                <a:cs typeface="Calibri"/>
+              </a:rPr>
+              <a:t> followed by </a:t>
+            </a:r>
+            <a:r>
+              <a:rPr sz="2050" b="0">
+                <a:solidFill>
+                  <a:srgbClr val="1750EB"/>
+                </a:solidFill>
+                <a:latin typeface="JetBrains Mono"/>
+                <a:ea typeface="JetBrains Mono"/>
+                <a:cs typeface="JetBrains Mono"/>
+              </a:rPr>
+              <a:t>average_score</a:t>
+            </a:r>
+            <a:r>
+              <a:rPr sz="2400" b="0">
+                <a:solidFill>
+                  <a:srgbClr val="080808"/>
+                </a:solidFill>
+                <a:latin typeface="Calibri"/>
+                <a:ea typeface="Calibri"/>
+                <a:cs typeface="Calibri"/>
+              </a:rPr>
+              <a:t>(7, 5). The output should end with </a:t>
+            </a:r>
+            <a:r>
+              <a:rPr sz="2050" b="0">
+                <a:solidFill>
+                  <a:srgbClr val="067D17"/>
+                </a:solidFill>
+                <a:latin typeface="JetBrains Mono"/>
+                <a:ea typeface="JetBrains Mono"/>
+                <a:cs typeface="JetBrains Mono"/>
+              </a:rPr>
+              <a:t>"Average: 6.0"</a:t>
+            </a:r>
+            <a:r>
+              <a:rPr sz="2400" b="0">
+                <a:solidFill>
+                  <a:srgbClr val="080808"/>
+                </a:solidFill>
+                <a:latin typeface="Calibri"/>
+                <a:ea typeface="Calibri"/>
+                <a:cs typeface="Calibri"/>
+              </a:rPr>
+              <a:t>.</a:t>
             </a:r>
           </a:p>
         </p:txBody>
@@ -7675,10 +7851,10 @@
                 <a:ea typeface="Calibri"/>
                 <a:cs typeface="Calibri"/>
               </a:rPr>
-              <a:t>A small shop needs a </a:t>
-            </a:r>
-            <a:r>
-              <a:rPr sz="2400" b="0">
+              <a:t>Create a function called </a:t>
+            </a:r>
+            <a:r>
+              <a:rPr sz="2050" b="0">
                 <a:solidFill>
                   <a:srgbClr val="1750EB"/>
                 </a:solidFill>
@@ -7686,7 +7862,7 @@
                 <a:ea typeface="JetBrains Mono"/>
                 <a:cs typeface="JetBrains Mono"/>
               </a:rPr>
-              <a:t>total_cost</a:t>
+              <a:t>area</a:t>
             </a:r>
             <a:r>
               <a:rPr sz="2400" b="0">
@@ -7697,10 +7873,10 @@
                 <a:ea typeface="Calibri"/>
                 <a:cs typeface="Calibri"/>
               </a:rPr>
-              <a:t>(price, delivery) function. Return the combined cost, store it, and display it with a clear label. For </a:t>
-            </a:r>
-            <a:r>
-              <a:rPr sz="2400" b="0">
+              <a:t>(length, width) that will </a:t>
+            </a:r>
+            <a:r>
+              <a:rPr sz="2050" b="0">
                 <a:solidFill>
                   <a:srgbClr val="1750EB"/>
                 </a:solidFill>
@@ -7708,7 +7884,7 @@
                 <a:ea typeface="JetBrains Mono"/>
                 <a:cs typeface="JetBrains Mono"/>
               </a:rPr>
-              <a:t>total_cost</a:t>
+              <a:t>return</a:t>
             </a:r>
             <a:r>
               <a:rPr sz="2400" b="0">
@@ -7719,7 +7895,73 @@
                 <a:ea typeface="Calibri"/>
                 <a:cs typeface="Calibri"/>
               </a:rPr>
-              <a:t>(12, 3), the result should be 15.</a:t>
+              <a:t> length * width. Ask for the length and width of two rooms as whole numbers. Call </a:t>
+            </a:r>
+            <a:r>
+              <a:rPr sz="2050" b="0">
+                <a:solidFill>
+                  <a:srgbClr val="1750EB"/>
+                </a:solidFill>
+                <a:latin typeface="JetBrains Mono"/>
+                <a:ea typeface="JetBrains Mono"/>
+                <a:cs typeface="JetBrains Mono"/>
+              </a:rPr>
+              <a:t>area()</a:t>
+            </a:r>
+            <a:r>
+              <a:rPr sz="2400" b="0">
+                <a:solidFill>
+                  <a:srgbClr val="080808"/>
+                </a:solidFill>
+                <a:latin typeface="Calibri"/>
+                <a:ea typeface="Calibri"/>
+                <a:cs typeface="Calibri"/>
+              </a:rPr>
+              <a:t> once for each room and display </a:t>
+            </a:r>
+            <a:r>
+              <a:rPr sz="2050" b="0">
+                <a:solidFill>
+                  <a:srgbClr val="067D17"/>
+                </a:solidFill>
+                <a:latin typeface="JetBrains Mono"/>
+                <a:ea typeface="JetBrains Mono"/>
+                <a:cs typeface="JetBrains Mono"/>
+              </a:rPr>
+              <a:t>"Total area:"</a:t>
+            </a:r>
+            <a:r>
+              <a:rPr sz="2400" b="0">
+                <a:solidFill>
+                  <a:srgbClr val="080808"/>
+                </a:solidFill>
+                <a:latin typeface="Calibri"/>
+                <a:ea typeface="Calibri"/>
+                <a:cs typeface="Calibri"/>
+              </a:rPr>
+              <a:t> followed by the two results added together. For example, 4 by 3 and 5 by 2 display </a:t>
+            </a:r>
+            <a:r>
+              <a:rPr sz="2050" b="0">
+                <a:solidFill>
+                  <a:srgbClr val="067D17"/>
+                </a:solidFill>
+                <a:latin typeface="JetBrains Mono"/>
+                <a:ea typeface="JetBrains Mono"/>
+                <a:cs typeface="JetBrains Mono"/>
+              </a:rPr>
+              <a:t>"Total area: 22"</a:t>
+            </a:r>
+            <a:r>
+              <a:rPr sz="2400" b="0">
+                <a:solidFill>
+                  <a:srgbClr val="080808"/>
+                </a:solidFill>
+                <a:latin typeface="Calibri"/>
+                <a:ea typeface="Calibri"/>
+                <a:cs typeface="Calibri"/>
+              </a:rPr>
+              <a:t>.</a:t>
             </a:r>
           </a:p>
         </p:txBody>

--- a/Mapped Curriculum Lessons/Grade 8/Lesson 33 - Functions with Results/Functions with Results - Slides.pptx
+++ b/Mapped Curriculum Lessons/Grade 8/Lesson 33 - Functions with Results/Functions with Results - Slides.pptx
@@ -2,28 +2,28 @@
 <file path=ppt/presentation.xml><?xml version="1.0" encoding="utf-8"?>
 <p:presentation xmlns:p="http://schemas.openxmlformats.org/presentationml/2006/main" embedTrueTypeFonts="1" saveSubsetFonts="0">
   <p:sldMasterIdLst>
-    <p:sldMasterId xmlns:r="http://schemas.openxmlformats.org/officeDocument/2006/relationships" id="2147483648" r:id="Rc98fb9335e0e43f4"/>
+    <p:sldMasterId xmlns:r="http://schemas.openxmlformats.org/officeDocument/2006/relationships" id="2147483648" r:id="Rd5899463df8e4c76"/>
   </p:sldMasterIdLst>
   <p:notesMasterIdLst>
-    <p:notesMasterId xmlns:r="http://schemas.openxmlformats.org/officeDocument/2006/relationships" r:id="Rac977b0e1e984f02"/>
+    <p:notesMasterId xmlns:r="http://schemas.openxmlformats.org/officeDocument/2006/relationships" r:id="R423a2c0a67d94d96"/>
   </p:notesMasterIdLst>
   <p:sldIdLst>
-    <p:sldId xmlns:r="http://schemas.openxmlformats.org/officeDocument/2006/relationships" id="256" r:id="Rc6ba949d446e4e49"/>
-    <p:sldId xmlns:r="http://schemas.openxmlformats.org/officeDocument/2006/relationships" id="257" r:id="R8c785fde1c2941c8"/>
-    <p:sldId xmlns:r="http://schemas.openxmlformats.org/officeDocument/2006/relationships" id="258" r:id="Rf045532161b94068"/>
-    <p:sldId xmlns:r="http://schemas.openxmlformats.org/officeDocument/2006/relationships" id="259" r:id="R3f49eccef1c943c0"/>
-    <p:sldId xmlns:r="http://schemas.openxmlformats.org/officeDocument/2006/relationships" id="260" r:id="Rdf7cec4782dc4f82"/>
-    <p:sldId xmlns:r="http://schemas.openxmlformats.org/officeDocument/2006/relationships" id="261" r:id="Ree1062f3d7204bf5"/>
-    <p:sldId xmlns:r="http://schemas.openxmlformats.org/officeDocument/2006/relationships" id="262" r:id="R91ce035436aa4e36"/>
-    <p:sldId xmlns:r="http://schemas.openxmlformats.org/officeDocument/2006/relationships" id="263" r:id="R22a57a98268744c0"/>
-    <p:sldId xmlns:r="http://schemas.openxmlformats.org/officeDocument/2006/relationships" id="264" r:id="R2fa820a89cce492f"/>
+    <p:sldId xmlns:r="http://schemas.openxmlformats.org/officeDocument/2006/relationships" id="256" r:id="Rfd72b9fd83fd40d5"/>
+    <p:sldId xmlns:r="http://schemas.openxmlformats.org/officeDocument/2006/relationships" id="257" r:id="R7a7b1cdda4ae4606"/>
+    <p:sldId xmlns:r="http://schemas.openxmlformats.org/officeDocument/2006/relationships" id="258" r:id="Ra6955ec5f8304c73"/>
+    <p:sldId xmlns:r="http://schemas.openxmlformats.org/officeDocument/2006/relationships" id="259" r:id="R9ee44b1fb6464bfe"/>
+    <p:sldId xmlns:r="http://schemas.openxmlformats.org/officeDocument/2006/relationships" id="260" r:id="Ra8b3d2cc52ae48a2"/>
+    <p:sldId xmlns:r="http://schemas.openxmlformats.org/officeDocument/2006/relationships" id="261" r:id="Rd50e196a077a4746"/>
+    <p:sldId xmlns:r="http://schemas.openxmlformats.org/officeDocument/2006/relationships" id="262" r:id="R2a4cb8d32fbc4c3f"/>
+    <p:sldId xmlns:r="http://schemas.openxmlformats.org/officeDocument/2006/relationships" id="263" r:id="R94b6b6aded5f4f1a"/>
+    <p:sldId xmlns:r="http://schemas.openxmlformats.org/officeDocument/2006/relationships" id="264" r:id="Rb5f74a06cde14042"/>
   </p:sldIdLst>
   <p:sldSz cx="12192000" cy="6858000"/>
   <p:notesSz cx="6858000" cy="9144000"/>
   <p:embeddedFontLst>
     <p:embeddedFont>
       <p:font typeface="JetBrains Mono"/>
-      <p:regular xmlns:r="http://schemas.openxmlformats.org/officeDocument/2006/relationships" r:id="Rcde8494ca1314943"/>
+      <p:regular xmlns:r="http://schemas.openxmlformats.org/officeDocument/2006/relationships" r:id="R6dbdc8a9b13143db"/>
     </p:embeddedFont>
   </p:embeddedFontLst>
 </p:presentation>
@@ -1071,7 +1071,7 @@
           <p:nvPr/>
         </p:nvPicPr>
         <p:blipFill rotWithShape="1">
-          <a:blip xmlns:r="http://schemas.openxmlformats.org/officeDocument/2006/relationships" xmlns:a="http://schemas.openxmlformats.org/drawingml/2006/main" r:embed="R6d2f768c0deb4bce"/>
+          <a:blip xmlns:r="http://schemas.openxmlformats.org/officeDocument/2006/relationships" xmlns:a="http://schemas.openxmlformats.org/drawingml/2006/main" r:embed="Rca059b63f81a4365"/>
           <a:stretch xmlns:a="http://schemas.openxmlformats.org/drawingml/2006/main"/>
         </p:blipFill>
         <p:spPr>
@@ -1451,7 +1451,7 @@
           <p:nvPr/>
         </p:nvPicPr>
         <p:blipFill rotWithShape="1">
-          <a:blip xmlns:r="http://schemas.openxmlformats.org/officeDocument/2006/relationships" xmlns:a="http://schemas.openxmlformats.org/drawingml/2006/main" r:embed="Re5378783b29d4b54">
+          <a:blip xmlns:r="http://schemas.openxmlformats.org/officeDocument/2006/relationships" xmlns:a="http://schemas.openxmlformats.org/drawingml/2006/main" r:embed="Rb1aa8cffafa64d0c">
             <a:alphaModFix amt="28000"/>
           </a:blip>
           <a:stretch xmlns:a="http://schemas.openxmlformats.org/drawingml/2006/main"/>
@@ -1664,7 +1664,7 @@
           <p:nvPr/>
         </p:nvPicPr>
         <p:blipFill rotWithShape="1">
-          <a:blip xmlns:r="http://schemas.openxmlformats.org/officeDocument/2006/relationships" xmlns:a="http://schemas.openxmlformats.org/drawingml/2006/main" r:embed="R26f523176aa749d3">
+          <a:blip xmlns:r="http://schemas.openxmlformats.org/officeDocument/2006/relationships" xmlns:a="http://schemas.openxmlformats.org/drawingml/2006/main" r:embed="Rcf6b9bc8ee9f45e4">
             <a:alphaModFix amt="28000"/>
           </a:blip>
           <a:stretch xmlns:a="http://schemas.openxmlformats.org/drawingml/2006/main"/>
@@ -1899,7 +1899,7 @@
           <p:nvPr/>
         </p:nvPicPr>
         <p:blipFill rotWithShape="1">
-          <a:blip xmlns:r="http://schemas.openxmlformats.org/officeDocument/2006/relationships" xmlns:a="http://schemas.openxmlformats.org/drawingml/2006/main" r:embed="Rd75dc6ad951a425d">
+          <a:blip xmlns:r="http://schemas.openxmlformats.org/officeDocument/2006/relationships" xmlns:a="http://schemas.openxmlformats.org/drawingml/2006/main" r:embed="R0330dc2a1c684810">
             <a:alphaModFix amt="28000"/>
           </a:blip>
           <a:stretch xmlns:a="http://schemas.openxmlformats.org/drawingml/2006/main"/>
@@ -2176,7 +2176,7 @@
           <p:nvPr/>
         </p:nvPicPr>
         <p:blipFill rotWithShape="1">
-          <a:blip xmlns:r="http://schemas.openxmlformats.org/officeDocument/2006/relationships" xmlns:a="http://schemas.openxmlformats.org/drawingml/2006/main" r:embed="Rcb3c5201310c4b7a">
+          <a:blip xmlns:r="http://schemas.openxmlformats.org/officeDocument/2006/relationships" xmlns:a="http://schemas.openxmlformats.org/drawingml/2006/main" r:embed="Rf9c70cd308704025">
             <a:alphaModFix amt="28000"/>
           </a:blip>
           <a:stretch xmlns:a="http://schemas.openxmlformats.org/drawingml/2006/main"/>
@@ -2451,7 +2451,7 @@
           <p:nvPr/>
         </p:nvPicPr>
         <p:blipFill rotWithShape="1">
-          <a:blip xmlns:r="http://schemas.openxmlformats.org/officeDocument/2006/relationships" xmlns:a="http://schemas.openxmlformats.org/drawingml/2006/main" r:embed="Radd09f5abdc54772">
+          <a:blip xmlns:r="http://schemas.openxmlformats.org/officeDocument/2006/relationships" xmlns:a="http://schemas.openxmlformats.org/drawingml/2006/main" r:embed="R0186b99650244985">
             <a:alphaModFix amt="28000"/>
           </a:blip>
           <a:stretch xmlns:a="http://schemas.openxmlformats.org/drawingml/2006/main"/>
@@ -2875,7 +2875,7 @@
           <p:nvPr/>
         </p:nvPicPr>
         <p:blipFill rotWithShape="1">
-          <a:blip xmlns:r="http://schemas.openxmlformats.org/officeDocument/2006/relationships" xmlns:a="http://schemas.openxmlformats.org/drawingml/2006/main" r:embed="R19bf6d4a52a3475b">
+          <a:blip xmlns:r="http://schemas.openxmlformats.org/officeDocument/2006/relationships" xmlns:a="http://schemas.openxmlformats.org/drawingml/2006/main" r:embed="R495ae7be49e444dc">
             <a:alphaModFix amt="28000"/>
           </a:blip>
           <a:stretch xmlns:a="http://schemas.openxmlformats.org/drawingml/2006/main"/>
@@ -3016,7 +3016,7 @@
           <p:nvPr/>
         </p:nvPicPr>
         <p:blipFill rotWithShape="1">
-          <a:blip xmlns:r="http://schemas.openxmlformats.org/officeDocument/2006/relationships" xmlns:a="http://schemas.openxmlformats.org/drawingml/2006/main" r:embed="Rb15bf8075dea4880">
+          <a:blip xmlns:r="http://schemas.openxmlformats.org/officeDocument/2006/relationships" xmlns:a="http://schemas.openxmlformats.org/drawingml/2006/main" r:embed="R903d07f2e26646dc">
             <a:alphaModFix amt="28000"/>
           </a:blip>
           <a:stretch xmlns:a="http://schemas.openxmlformats.org/drawingml/2006/main"/>
@@ -3130,7 +3130,7 @@
           <p:nvPr/>
         </p:nvPicPr>
         <p:blipFill rotWithShape="1">
-          <a:blip xmlns:r="http://schemas.openxmlformats.org/officeDocument/2006/relationships" xmlns:a="http://schemas.openxmlformats.org/drawingml/2006/main" r:embed="Rad11d1890def4154">
+          <a:blip xmlns:r="http://schemas.openxmlformats.org/officeDocument/2006/relationships" xmlns:a="http://schemas.openxmlformats.org/drawingml/2006/main" r:embed="R2076400d737a4766">
             <a:alphaModFix amt="28000"/>
           </a:blip>
           <a:stretch xmlns:a="http://schemas.openxmlformats.org/drawingml/2006/main"/>
@@ -3457,7 +3457,7 @@
           <p:nvPr/>
         </p:nvPicPr>
         <p:blipFill rotWithShape="1">
-          <a:blip xmlns:r="http://schemas.openxmlformats.org/officeDocument/2006/relationships" xmlns:a="http://schemas.openxmlformats.org/drawingml/2006/main" r:embed="R10319e77a59e421b">
+          <a:blip xmlns:r="http://schemas.openxmlformats.org/officeDocument/2006/relationships" xmlns:a="http://schemas.openxmlformats.org/drawingml/2006/main" r:embed="R42bf36e8b7e449a7">
             <a:alphaModFix amt="28000"/>
           </a:blip>
           <a:stretch xmlns:a="http://schemas.openxmlformats.org/drawingml/2006/main"/>
@@ -3745,7 +3745,7 @@
           <p:nvPr/>
         </p:nvPicPr>
         <p:blipFill rotWithShape="1">
-          <a:blip xmlns:r="http://schemas.openxmlformats.org/officeDocument/2006/relationships" xmlns:a="http://schemas.openxmlformats.org/drawingml/2006/main" r:embed="R192fb48fc3ca4e3e">
+          <a:blip xmlns:r="http://schemas.openxmlformats.org/officeDocument/2006/relationships" xmlns:a="http://schemas.openxmlformats.org/drawingml/2006/main" r:embed="Ra7d04e17fbbf4f22">
             <a:alphaModFix amt="28000"/>
           </a:blip>
           <a:stretch xmlns:a="http://schemas.openxmlformats.org/drawingml/2006/main"/>
@@ -3982,17 +3982,17 @@
   </p:cSld>
   <p:clrMap bg1="lt1" tx1="dk1" bg2="lt2" tx2="dk2" accent1="accent1" accent2="accent2" accent3="accent3" accent4="accent4" accent5="accent5" accent6="accent6" hlink="hlink" folHlink="folHlink"/>
   <p:sldLayoutIdLst>
-    <p:sldLayoutId xmlns:r="http://schemas.openxmlformats.org/officeDocument/2006/relationships" id="2147483649" r:id="Rb28906a2ec5b4495"/>
-    <p:sldLayoutId xmlns:r="http://schemas.openxmlformats.org/officeDocument/2006/relationships" id="2147483650" r:id="R1f0240773d9c409c"/>
-    <p:sldLayoutId xmlns:r="http://schemas.openxmlformats.org/officeDocument/2006/relationships" id="2147483651" r:id="R7660ccba6cc141d8"/>
-    <p:sldLayoutId xmlns:r="http://schemas.openxmlformats.org/officeDocument/2006/relationships" id="2147483652" r:id="Ref8fda9f6b2a45d2"/>
-    <p:sldLayoutId xmlns:r="http://schemas.openxmlformats.org/officeDocument/2006/relationships" id="2147483653" r:id="R449547355fac419c"/>
-    <p:sldLayoutId xmlns:r="http://schemas.openxmlformats.org/officeDocument/2006/relationships" id="2147483654" r:id="R5cc81961c77840b7"/>
-    <p:sldLayoutId xmlns:r="http://schemas.openxmlformats.org/officeDocument/2006/relationships" id="2147483655" r:id="R46e1bfb1116f49fb"/>
-    <p:sldLayoutId xmlns:r="http://schemas.openxmlformats.org/officeDocument/2006/relationships" id="2147483656" r:id="R93ceb96ef9b74303"/>
-    <p:sldLayoutId xmlns:r="http://schemas.openxmlformats.org/officeDocument/2006/relationships" id="2147483657" r:id="R162186b08a504811"/>
-    <p:sldLayoutId xmlns:r="http://schemas.openxmlformats.org/officeDocument/2006/relationships" id="2147483658" r:id="R9694fee68bc84978"/>
-    <p:sldLayoutId xmlns:r="http://schemas.openxmlformats.org/officeDocument/2006/relationships" id="2147483659" r:id="R39fcf473cb614002"/>
+    <p:sldLayoutId xmlns:r="http://schemas.openxmlformats.org/officeDocument/2006/relationships" id="2147483649" r:id="R9597f9e16e7642df"/>
+    <p:sldLayoutId xmlns:r="http://schemas.openxmlformats.org/officeDocument/2006/relationships" id="2147483650" r:id="Ra24c5c05983d49da"/>
+    <p:sldLayoutId xmlns:r="http://schemas.openxmlformats.org/officeDocument/2006/relationships" id="2147483651" r:id="R1659a9837f4b4d2b"/>
+    <p:sldLayoutId xmlns:r="http://schemas.openxmlformats.org/officeDocument/2006/relationships" id="2147483652" r:id="Rfaf6bffd59ad450a"/>
+    <p:sldLayoutId xmlns:r="http://schemas.openxmlformats.org/officeDocument/2006/relationships" id="2147483653" r:id="R5623a13768f245fd"/>
+    <p:sldLayoutId xmlns:r="http://schemas.openxmlformats.org/officeDocument/2006/relationships" id="2147483654" r:id="Rd99636a8f4894dfe"/>
+    <p:sldLayoutId xmlns:r="http://schemas.openxmlformats.org/officeDocument/2006/relationships" id="2147483655" r:id="R90d1f203b1864d1e"/>
+    <p:sldLayoutId xmlns:r="http://schemas.openxmlformats.org/officeDocument/2006/relationships" id="2147483656" r:id="Re274286ab1ab4a22"/>
+    <p:sldLayoutId xmlns:r="http://schemas.openxmlformats.org/officeDocument/2006/relationships" id="2147483657" r:id="Rde9d058b7f9d4224"/>
+    <p:sldLayoutId xmlns:r="http://schemas.openxmlformats.org/officeDocument/2006/relationships" id="2147483658" r:id="Ref783f08f9e64326"/>
+    <p:sldLayoutId xmlns:r="http://schemas.openxmlformats.org/officeDocument/2006/relationships" id="2147483659" r:id="R96cbca783a9e43cd"/>
   </p:sldLayoutIdLst>
   <p:hf hdr="0" ftr="0" dt="0"/>
   <p:txStyles>
@@ -4898,7 +4898,7 @@
             <a:r>
               <a:rPr sz="2400">
                 <a:solidFill>
-                  <a:srgbClr val="1750EB"/>
+                  <a:srgbClr val="C45E00"/>
                 </a:solidFill>
                 <a:latin typeface="JetBrains Mono"/>
                 <a:ea typeface="JetBrains Mono"/>
@@ -4958,7 +4958,7 @@
             <a:r>
               <a:rPr sz="2400">
                 <a:solidFill>
-                  <a:srgbClr val="1750EB"/>
+                  <a:srgbClr val="C45E00"/>
                 </a:solidFill>
                 <a:latin typeface="JetBrains Mono"/>
                 <a:ea typeface="JetBrains Mono"/>
@@ -5317,7 +5317,7 @@
             <a:r>
               <a:rPr sz="2400">
                 <a:solidFill>
-                  <a:srgbClr val="1750EB"/>
+                  <a:srgbClr val="C45E00"/>
                 </a:solidFill>
                 <a:latin typeface="JetBrains Mono"/>
                 <a:ea typeface="JetBrains Mono"/>
@@ -5377,7 +5377,7 @@
             <a:r>
               <a:rPr sz="2400">
                 <a:solidFill>
-                  <a:srgbClr val="1750EB"/>
+                  <a:srgbClr val="C45E00"/>
                 </a:solidFill>
                 <a:latin typeface="JetBrains Mono"/>
                 <a:ea typeface="JetBrains Mono"/>
@@ -5736,7 +5736,7 @@
             <a:r>
               <a:rPr sz="2400">
                 <a:solidFill>
-                  <a:srgbClr val="1750EB"/>
+                  <a:srgbClr val="C45E00"/>
                 </a:solidFill>
                 <a:latin typeface="JetBrains Mono"/>
                 <a:ea typeface="JetBrains Mono"/>
@@ -5796,7 +5796,7 @@
             <a:r>
               <a:rPr sz="2400">
                 <a:solidFill>
-                  <a:srgbClr val="1750EB"/>
+                  <a:srgbClr val="C45E00"/>
                 </a:solidFill>
                 <a:latin typeface="JetBrains Mono"/>
                 <a:ea typeface="JetBrains Mono"/>
@@ -6406,7 +6406,7 @@
             <a:r>
               <a:rPr sz="1600">
                 <a:solidFill>
-                  <a:srgbClr val="1750EB"/>
+                  <a:srgbClr val="C45E00"/>
                 </a:solidFill>
                 <a:latin typeface="JetBrains Mono"/>
                 <a:ea typeface="JetBrains Mono"/>
@@ -6470,7 +6470,7 @@
             <a:r>
               <a:rPr sz="1600">
                 <a:solidFill>
-                  <a:srgbClr val="1750EB"/>
+                  <a:srgbClr val="C45E00"/>
                 </a:solidFill>
                 <a:latin typeface="JetBrains Mono"/>
                 <a:ea typeface="JetBrains Mono"/>
@@ -6987,7 +6987,7 @@
             <a:r>
               <a:rPr sz="1600">
                 <a:solidFill>
-                  <a:srgbClr val="1750EB"/>
+                  <a:srgbClr val="C45E00"/>
                 </a:solidFill>
                 <a:latin typeface="JetBrains Mono"/>
                 <a:ea typeface="JetBrains Mono"/>
@@ -7051,7 +7051,7 @@
             <a:r>
               <a:rPr sz="1600">
                 <a:solidFill>
-                  <a:srgbClr val="1750EB"/>
+                  <a:srgbClr val="C45E00"/>
                 </a:solidFill>
                 <a:latin typeface="JetBrains Mono"/>
                 <a:ea typeface="JetBrains Mono"/>
@@ -7253,7 +7253,7 @@
             <a:r>
               <a:rPr sz="2050" b="0">
                 <a:solidFill>
-                  <a:srgbClr val="1750EB"/>
+                  <a:srgbClr val="C45E00"/>
                 </a:solidFill>
                 <a:latin typeface="JetBrains Mono"/>
                 <a:ea typeface="JetBrains Mono"/>
@@ -7612,7 +7612,7 @@
             <a:r>
               <a:rPr sz="1600">
                 <a:solidFill>
-                  <a:srgbClr val="1750EB"/>
+                  <a:srgbClr val="C45E00"/>
                 </a:solidFill>
                 <a:latin typeface="JetBrains Mono"/>
                 <a:ea typeface="JetBrains Mono"/>
@@ -7676,7 +7676,7 @@
             <a:r>
               <a:rPr sz="1600">
                 <a:solidFill>
-                  <a:srgbClr val="1750EB"/>
+                  <a:srgbClr val="C45E00"/>
                 </a:solidFill>
                 <a:latin typeface="JetBrains Mono"/>
                 <a:ea typeface="JetBrains Mono"/>
@@ -7878,7 +7878,7 @@
             <a:r>
               <a:rPr sz="2050" b="0">
                 <a:solidFill>
-                  <a:srgbClr val="1750EB"/>
+                  <a:srgbClr val="C45E00"/>
                 </a:solidFill>
                 <a:latin typeface="JetBrains Mono"/>
                 <a:ea typeface="JetBrains Mono"/>
@@ -8237,7 +8237,7 @@
             <a:r>
               <a:rPr sz="1600">
                 <a:solidFill>
-                  <a:srgbClr val="1750EB"/>
+                  <a:srgbClr val="C45E00"/>
                 </a:solidFill>
                 <a:latin typeface="JetBrains Mono"/>
                 <a:ea typeface="JetBrains Mono"/>
@@ -8301,7 +8301,7 @@
             <a:r>
               <a:rPr sz="1600">
                 <a:solidFill>
-                  <a:srgbClr val="1750EB"/>
+                  <a:srgbClr val="C45E00"/>
                 </a:solidFill>
                 <a:latin typeface="JetBrains Mono"/>
                 <a:ea typeface="JetBrains Mono"/>
@@ -8510,7 +8510,7 @@
             <a:r>
               <a:rPr sz="1800">
                 <a:solidFill>
-                  <a:srgbClr val="1750EB"/>
+                  <a:srgbClr val="C45E00"/>
                 </a:solidFill>
                 <a:latin typeface="JetBrains Mono"/>
                 <a:ea typeface="JetBrains Mono"/>
@@ -8570,7 +8570,7 @@
             <a:r>
               <a:rPr sz="1800">
                 <a:solidFill>
-                  <a:srgbClr val="1750EB"/>
+                  <a:srgbClr val="C45E00"/>
                 </a:solidFill>
                 <a:latin typeface="JetBrains Mono"/>
                 <a:ea typeface="JetBrains Mono"/>

--- a/Mapped Curriculum Lessons/Grade 8/Lesson 33 - Functions with Results/Functions with Results - Slides.pptx
+++ b/Mapped Curriculum Lessons/Grade 8/Lesson 33 - Functions with Results/Functions with Results - Slides.pptx
@@ -2,28 +2,28 @@
 <file path=ppt/presentation.xml><?xml version="1.0" encoding="utf-8"?>
 <p:presentation xmlns:p="http://schemas.openxmlformats.org/presentationml/2006/main" embedTrueTypeFonts="1" saveSubsetFonts="0">
   <p:sldMasterIdLst>
-    <p:sldMasterId xmlns:r="http://schemas.openxmlformats.org/officeDocument/2006/relationships" id="2147483648" r:id="Rd5899463df8e4c76"/>
+    <p:sldMasterId xmlns:r="http://schemas.openxmlformats.org/officeDocument/2006/relationships" id="2147483648" r:id="Rc547e57c91534fdb"/>
   </p:sldMasterIdLst>
   <p:notesMasterIdLst>
-    <p:notesMasterId xmlns:r="http://schemas.openxmlformats.org/officeDocument/2006/relationships" r:id="R423a2c0a67d94d96"/>
+    <p:notesMasterId xmlns:r="http://schemas.openxmlformats.org/officeDocument/2006/relationships" r:id="Rc8ace54f5055427e"/>
   </p:notesMasterIdLst>
   <p:sldIdLst>
-    <p:sldId xmlns:r="http://schemas.openxmlformats.org/officeDocument/2006/relationships" id="256" r:id="Rfd72b9fd83fd40d5"/>
-    <p:sldId xmlns:r="http://schemas.openxmlformats.org/officeDocument/2006/relationships" id="257" r:id="R7a7b1cdda4ae4606"/>
-    <p:sldId xmlns:r="http://schemas.openxmlformats.org/officeDocument/2006/relationships" id="258" r:id="Ra6955ec5f8304c73"/>
-    <p:sldId xmlns:r="http://schemas.openxmlformats.org/officeDocument/2006/relationships" id="259" r:id="R9ee44b1fb6464bfe"/>
-    <p:sldId xmlns:r="http://schemas.openxmlformats.org/officeDocument/2006/relationships" id="260" r:id="Ra8b3d2cc52ae48a2"/>
-    <p:sldId xmlns:r="http://schemas.openxmlformats.org/officeDocument/2006/relationships" id="261" r:id="Rd50e196a077a4746"/>
-    <p:sldId xmlns:r="http://schemas.openxmlformats.org/officeDocument/2006/relationships" id="262" r:id="R2a4cb8d32fbc4c3f"/>
-    <p:sldId xmlns:r="http://schemas.openxmlformats.org/officeDocument/2006/relationships" id="263" r:id="R94b6b6aded5f4f1a"/>
-    <p:sldId xmlns:r="http://schemas.openxmlformats.org/officeDocument/2006/relationships" id="264" r:id="Rb5f74a06cde14042"/>
+    <p:sldId xmlns:r="http://schemas.openxmlformats.org/officeDocument/2006/relationships" id="256" r:id="Ra93dfa7ffb514545"/>
+    <p:sldId xmlns:r="http://schemas.openxmlformats.org/officeDocument/2006/relationships" id="257" r:id="Rd3d7c2a2ae3a462e"/>
+    <p:sldId xmlns:r="http://schemas.openxmlformats.org/officeDocument/2006/relationships" id="258" r:id="Rf18a4c9fa9a14f95"/>
+    <p:sldId xmlns:r="http://schemas.openxmlformats.org/officeDocument/2006/relationships" id="259" r:id="R1366596c32334727"/>
+    <p:sldId xmlns:r="http://schemas.openxmlformats.org/officeDocument/2006/relationships" id="260" r:id="R5afe3b616ea34613"/>
+    <p:sldId xmlns:r="http://schemas.openxmlformats.org/officeDocument/2006/relationships" id="261" r:id="Rd0bcb288f3a74eb5"/>
+    <p:sldId xmlns:r="http://schemas.openxmlformats.org/officeDocument/2006/relationships" id="262" r:id="Ra3f64e799cf646a3"/>
+    <p:sldId xmlns:r="http://schemas.openxmlformats.org/officeDocument/2006/relationships" id="263" r:id="R4b5a12df44c34b32"/>
+    <p:sldId xmlns:r="http://schemas.openxmlformats.org/officeDocument/2006/relationships" id="264" r:id="R4c29bb85dc6346df"/>
   </p:sldIdLst>
   <p:sldSz cx="12192000" cy="6858000"/>
   <p:notesSz cx="6858000" cy="9144000"/>
   <p:embeddedFontLst>
     <p:embeddedFont>
       <p:font typeface="JetBrains Mono"/>
-      <p:regular xmlns:r="http://schemas.openxmlformats.org/officeDocument/2006/relationships" r:id="R6dbdc8a9b13143db"/>
+      <p:regular xmlns:r="http://schemas.openxmlformats.org/officeDocument/2006/relationships" r:id="R069a61a7c83a4a75"/>
     </p:embeddedFont>
   </p:embeddedFontLst>
 </p:presentation>
@@ -1071,7 +1071,7 @@
           <p:nvPr/>
         </p:nvPicPr>
         <p:blipFill rotWithShape="1">
-          <a:blip xmlns:r="http://schemas.openxmlformats.org/officeDocument/2006/relationships" xmlns:a="http://schemas.openxmlformats.org/drawingml/2006/main" r:embed="Rca059b63f81a4365"/>
+          <a:blip xmlns:r="http://schemas.openxmlformats.org/officeDocument/2006/relationships" xmlns:a="http://schemas.openxmlformats.org/drawingml/2006/main" r:embed="R717a92283aae4292"/>
           <a:stretch xmlns:a="http://schemas.openxmlformats.org/drawingml/2006/main"/>
         </p:blipFill>
         <p:spPr>
@@ -1451,7 +1451,7 @@
           <p:nvPr/>
         </p:nvPicPr>
         <p:blipFill rotWithShape="1">
-          <a:blip xmlns:r="http://schemas.openxmlformats.org/officeDocument/2006/relationships" xmlns:a="http://schemas.openxmlformats.org/drawingml/2006/main" r:embed="Rb1aa8cffafa64d0c">
+          <a:blip xmlns:r="http://schemas.openxmlformats.org/officeDocument/2006/relationships" xmlns:a="http://schemas.openxmlformats.org/drawingml/2006/main" r:embed="R45a40abc52534663">
             <a:alphaModFix amt="28000"/>
           </a:blip>
           <a:stretch xmlns:a="http://schemas.openxmlformats.org/drawingml/2006/main"/>
@@ -1664,7 +1664,7 @@
           <p:nvPr/>
         </p:nvPicPr>
         <p:blipFill rotWithShape="1">
-          <a:blip xmlns:r="http://schemas.openxmlformats.org/officeDocument/2006/relationships" xmlns:a="http://schemas.openxmlformats.org/drawingml/2006/main" r:embed="Rcf6b9bc8ee9f45e4">
+          <a:blip xmlns:r="http://schemas.openxmlformats.org/officeDocument/2006/relationships" xmlns:a="http://schemas.openxmlformats.org/drawingml/2006/main" r:embed="Re9ec53def0ce4594">
             <a:alphaModFix amt="28000"/>
           </a:blip>
           <a:stretch xmlns:a="http://schemas.openxmlformats.org/drawingml/2006/main"/>
@@ -1899,7 +1899,7 @@
           <p:nvPr/>
         </p:nvPicPr>
         <p:blipFill rotWithShape="1">
-          <a:blip xmlns:r="http://schemas.openxmlformats.org/officeDocument/2006/relationships" xmlns:a="http://schemas.openxmlformats.org/drawingml/2006/main" r:embed="R0330dc2a1c684810">
+          <a:blip xmlns:r="http://schemas.openxmlformats.org/officeDocument/2006/relationships" xmlns:a="http://schemas.openxmlformats.org/drawingml/2006/main" r:embed="R39fa6d50acff412f">
             <a:alphaModFix amt="28000"/>
           </a:blip>
           <a:stretch xmlns:a="http://schemas.openxmlformats.org/drawingml/2006/main"/>
@@ -2176,7 +2176,7 @@
           <p:nvPr/>
         </p:nvPicPr>
         <p:blipFill rotWithShape="1">
-          <a:blip xmlns:r="http://schemas.openxmlformats.org/officeDocument/2006/relationships" xmlns:a="http://schemas.openxmlformats.org/drawingml/2006/main" r:embed="Rf9c70cd308704025">
+          <a:blip xmlns:r="http://schemas.openxmlformats.org/officeDocument/2006/relationships" xmlns:a="http://schemas.openxmlformats.org/drawingml/2006/main" r:embed="R6d95df1917d94ea2">
             <a:alphaModFix amt="28000"/>
           </a:blip>
           <a:stretch xmlns:a="http://schemas.openxmlformats.org/drawingml/2006/main"/>
@@ -2451,7 +2451,7 @@
           <p:nvPr/>
         </p:nvPicPr>
         <p:blipFill rotWithShape="1">
-          <a:blip xmlns:r="http://schemas.openxmlformats.org/officeDocument/2006/relationships" xmlns:a="http://schemas.openxmlformats.org/drawingml/2006/main" r:embed="R0186b99650244985">
+          <a:blip xmlns:r="http://schemas.openxmlformats.org/officeDocument/2006/relationships" xmlns:a="http://schemas.openxmlformats.org/drawingml/2006/main" r:embed="R714934dd3b6d464b">
             <a:alphaModFix amt="28000"/>
           </a:blip>
           <a:stretch xmlns:a="http://schemas.openxmlformats.org/drawingml/2006/main"/>
@@ -2875,7 +2875,7 @@
           <p:nvPr/>
         </p:nvPicPr>
         <p:blipFill rotWithShape="1">
-          <a:blip xmlns:r="http://schemas.openxmlformats.org/officeDocument/2006/relationships" xmlns:a="http://schemas.openxmlformats.org/drawingml/2006/main" r:embed="R495ae7be49e444dc">
+          <a:blip xmlns:r="http://schemas.openxmlformats.org/officeDocument/2006/relationships" xmlns:a="http://schemas.openxmlformats.org/drawingml/2006/main" r:embed="R0e4f78c24f7b4c44">
             <a:alphaModFix amt="28000"/>
           </a:blip>
           <a:stretch xmlns:a="http://schemas.openxmlformats.org/drawingml/2006/main"/>
@@ -3016,7 +3016,7 @@
           <p:nvPr/>
         </p:nvPicPr>
         <p:blipFill rotWithShape="1">
-          <a:blip xmlns:r="http://schemas.openxmlformats.org/officeDocument/2006/relationships" xmlns:a="http://schemas.openxmlformats.org/drawingml/2006/main" r:embed="R903d07f2e26646dc">
+          <a:blip xmlns:r="http://schemas.openxmlformats.org/officeDocument/2006/relationships" xmlns:a="http://schemas.openxmlformats.org/drawingml/2006/main" r:embed="R30b961b800c84027">
             <a:alphaModFix amt="28000"/>
           </a:blip>
           <a:stretch xmlns:a="http://schemas.openxmlformats.org/drawingml/2006/main"/>
@@ -3130,7 +3130,7 @@
           <p:nvPr/>
         </p:nvPicPr>
         <p:blipFill rotWithShape="1">
-          <a:blip xmlns:r="http://schemas.openxmlformats.org/officeDocument/2006/relationships" xmlns:a="http://schemas.openxmlformats.org/drawingml/2006/main" r:embed="R2076400d737a4766">
+          <a:blip xmlns:r="http://schemas.openxmlformats.org/officeDocument/2006/relationships" xmlns:a="http://schemas.openxmlformats.org/drawingml/2006/main" r:embed="R9c0d04de2f4a411d">
             <a:alphaModFix amt="28000"/>
           </a:blip>
           <a:stretch xmlns:a="http://schemas.openxmlformats.org/drawingml/2006/main"/>
@@ -3457,7 +3457,7 @@
           <p:nvPr/>
         </p:nvPicPr>
         <p:blipFill rotWithShape="1">
-          <a:blip xmlns:r="http://schemas.openxmlformats.org/officeDocument/2006/relationships" xmlns:a="http://schemas.openxmlformats.org/drawingml/2006/main" r:embed="R42bf36e8b7e449a7">
+          <a:blip xmlns:r="http://schemas.openxmlformats.org/officeDocument/2006/relationships" xmlns:a="http://schemas.openxmlformats.org/drawingml/2006/main" r:embed="Rf1f96d2580b14d1c">
             <a:alphaModFix amt="28000"/>
           </a:blip>
           <a:stretch xmlns:a="http://schemas.openxmlformats.org/drawingml/2006/main"/>
@@ -3745,7 +3745,7 @@
           <p:nvPr/>
         </p:nvPicPr>
         <p:blipFill rotWithShape="1">
-          <a:blip xmlns:r="http://schemas.openxmlformats.org/officeDocument/2006/relationships" xmlns:a="http://schemas.openxmlformats.org/drawingml/2006/main" r:embed="Ra7d04e17fbbf4f22">
+          <a:blip xmlns:r="http://schemas.openxmlformats.org/officeDocument/2006/relationships" xmlns:a="http://schemas.openxmlformats.org/drawingml/2006/main" r:embed="Rca2ef9c22b2846a1">
             <a:alphaModFix amt="28000"/>
           </a:blip>
           <a:stretch xmlns:a="http://schemas.openxmlformats.org/drawingml/2006/main"/>
@@ -3982,17 +3982,17 @@
   </p:cSld>
   <p:clrMap bg1="lt1" tx1="dk1" bg2="lt2" tx2="dk2" accent1="accent1" accent2="accent2" accent3="accent3" accent4="accent4" accent5="accent5" accent6="accent6" hlink="hlink" folHlink="folHlink"/>
   <p:sldLayoutIdLst>
-    <p:sldLayoutId xmlns:r="http://schemas.openxmlformats.org/officeDocument/2006/relationships" id="2147483649" r:id="R9597f9e16e7642df"/>
-    <p:sldLayoutId xmlns:r="http://schemas.openxmlformats.org/officeDocument/2006/relationships" id="2147483650" r:id="Ra24c5c05983d49da"/>
-    <p:sldLayoutId xmlns:r="http://schemas.openxmlformats.org/officeDocument/2006/relationships" id="2147483651" r:id="R1659a9837f4b4d2b"/>
-    <p:sldLayoutId xmlns:r="http://schemas.openxmlformats.org/officeDocument/2006/relationships" id="2147483652" r:id="Rfaf6bffd59ad450a"/>
-    <p:sldLayoutId xmlns:r="http://schemas.openxmlformats.org/officeDocument/2006/relationships" id="2147483653" r:id="R5623a13768f245fd"/>
-    <p:sldLayoutId xmlns:r="http://schemas.openxmlformats.org/officeDocument/2006/relationships" id="2147483654" r:id="Rd99636a8f4894dfe"/>
-    <p:sldLayoutId xmlns:r="http://schemas.openxmlformats.org/officeDocument/2006/relationships" id="2147483655" r:id="R90d1f203b1864d1e"/>
-    <p:sldLayoutId xmlns:r="http://schemas.openxmlformats.org/officeDocument/2006/relationships" id="2147483656" r:id="Re274286ab1ab4a22"/>
-    <p:sldLayoutId xmlns:r="http://schemas.openxmlformats.org/officeDocument/2006/relationships" id="2147483657" r:id="Rde9d058b7f9d4224"/>
-    <p:sldLayoutId xmlns:r="http://schemas.openxmlformats.org/officeDocument/2006/relationships" id="2147483658" r:id="Ref783f08f9e64326"/>
-    <p:sldLayoutId xmlns:r="http://schemas.openxmlformats.org/officeDocument/2006/relationships" id="2147483659" r:id="R96cbca783a9e43cd"/>
+    <p:sldLayoutId xmlns:r="http://schemas.openxmlformats.org/officeDocument/2006/relationships" id="2147483649" r:id="Rf9d105bf92824215"/>
+    <p:sldLayoutId xmlns:r="http://schemas.openxmlformats.org/officeDocument/2006/relationships" id="2147483650" r:id="R24f319430c0745ae"/>
+    <p:sldLayoutId xmlns:r="http://schemas.openxmlformats.org/officeDocument/2006/relationships" id="2147483651" r:id="R4d099d1328db4560"/>
+    <p:sldLayoutId xmlns:r="http://schemas.openxmlformats.org/officeDocument/2006/relationships" id="2147483652" r:id="R00f1a7e4fa93403a"/>
+    <p:sldLayoutId xmlns:r="http://schemas.openxmlformats.org/officeDocument/2006/relationships" id="2147483653" r:id="R0d0ca76cf37046d9"/>
+    <p:sldLayoutId xmlns:r="http://schemas.openxmlformats.org/officeDocument/2006/relationships" id="2147483654" r:id="R72c1fc3129484563"/>
+    <p:sldLayoutId xmlns:r="http://schemas.openxmlformats.org/officeDocument/2006/relationships" id="2147483655" r:id="R279e3a9a46df47cb"/>
+    <p:sldLayoutId xmlns:r="http://schemas.openxmlformats.org/officeDocument/2006/relationships" id="2147483656" r:id="R66a2d2e9359f4cab"/>
+    <p:sldLayoutId xmlns:r="http://schemas.openxmlformats.org/officeDocument/2006/relationships" id="2147483657" r:id="R1a2763eef09b42a7"/>
+    <p:sldLayoutId xmlns:r="http://schemas.openxmlformats.org/officeDocument/2006/relationships" id="2147483658" r:id="Rb66ef8855cdb4240"/>
+    <p:sldLayoutId xmlns:r="http://schemas.openxmlformats.org/officeDocument/2006/relationships" id="2147483659" r:id="R282268514543446a"/>
   </p:sldLayoutIdLst>
   <p:hf hdr="0" ftr="0" dt="0"/>
   <p:txStyles>

--- a/Mapped Curriculum Lessons/Grade 8/Lesson 33 - Functions with Results/Functions with Results - Slides.pptx
+++ b/Mapped Curriculum Lessons/Grade 8/Lesson 33 - Functions with Results/Functions with Results - Slides.pptx
@@ -2,28 +2,28 @@
 <file path=ppt/presentation.xml><?xml version="1.0" encoding="utf-8"?>
 <p:presentation xmlns:p="http://schemas.openxmlformats.org/presentationml/2006/main" embedTrueTypeFonts="1" saveSubsetFonts="0">
   <p:sldMasterIdLst>
-    <p:sldMasterId xmlns:r="http://schemas.openxmlformats.org/officeDocument/2006/relationships" id="2147483648" r:id="Rc547e57c91534fdb"/>
+    <p:sldMasterId xmlns:r="http://schemas.openxmlformats.org/officeDocument/2006/relationships" id="2147483648" r:id="R19fffab0811e44a0"/>
   </p:sldMasterIdLst>
   <p:notesMasterIdLst>
-    <p:notesMasterId xmlns:r="http://schemas.openxmlformats.org/officeDocument/2006/relationships" r:id="Rc8ace54f5055427e"/>
+    <p:notesMasterId xmlns:r="http://schemas.openxmlformats.org/officeDocument/2006/relationships" r:id="R66dc9dd1c299455c"/>
   </p:notesMasterIdLst>
   <p:sldIdLst>
-    <p:sldId xmlns:r="http://schemas.openxmlformats.org/officeDocument/2006/relationships" id="256" r:id="Ra93dfa7ffb514545"/>
-    <p:sldId xmlns:r="http://schemas.openxmlformats.org/officeDocument/2006/relationships" id="257" r:id="Rd3d7c2a2ae3a462e"/>
-    <p:sldId xmlns:r="http://schemas.openxmlformats.org/officeDocument/2006/relationships" id="258" r:id="Rf18a4c9fa9a14f95"/>
-    <p:sldId xmlns:r="http://schemas.openxmlformats.org/officeDocument/2006/relationships" id="259" r:id="R1366596c32334727"/>
-    <p:sldId xmlns:r="http://schemas.openxmlformats.org/officeDocument/2006/relationships" id="260" r:id="R5afe3b616ea34613"/>
-    <p:sldId xmlns:r="http://schemas.openxmlformats.org/officeDocument/2006/relationships" id="261" r:id="Rd0bcb288f3a74eb5"/>
-    <p:sldId xmlns:r="http://schemas.openxmlformats.org/officeDocument/2006/relationships" id="262" r:id="Ra3f64e799cf646a3"/>
-    <p:sldId xmlns:r="http://schemas.openxmlformats.org/officeDocument/2006/relationships" id="263" r:id="R4b5a12df44c34b32"/>
-    <p:sldId xmlns:r="http://schemas.openxmlformats.org/officeDocument/2006/relationships" id="264" r:id="R4c29bb85dc6346df"/>
+    <p:sldId xmlns:r="http://schemas.openxmlformats.org/officeDocument/2006/relationships" id="256" r:id="R05aaa5da5d9343f3"/>
+    <p:sldId xmlns:r="http://schemas.openxmlformats.org/officeDocument/2006/relationships" id="257" r:id="R95f57af9480b4f71"/>
+    <p:sldId xmlns:r="http://schemas.openxmlformats.org/officeDocument/2006/relationships" id="258" r:id="Rfc573a388eab40d0"/>
+    <p:sldId xmlns:r="http://schemas.openxmlformats.org/officeDocument/2006/relationships" id="259" r:id="Rff1dcf6eb65d4aa5"/>
+    <p:sldId xmlns:r="http://schemas.openxmlformats.org/officeDocument/2006/relationships" id="260" r:id="R8f9dc4f8a4b14028"/>
+    <p:sldId xmlns:r="http://schemas.openxmlformats.org/officeDocument/2006/relationships" id="261" r:id="R479683bcf2254d42"/>
+    <p:sldId xmlns:r="http://schemas.openxmlformats.org/officeDocument/2006/relationships" id="262" r:id="Rc44f0865288143d1"/>
+    <p:sldId xmlns:r="http://schemas.openxmlformats.org/officeDocument/2006/relationships" id="263" r:id="Rf083c33615104e64"/>
+    <p:sldId xmlns:r="http://schemas.openxmlformats.org/officeDocument/2006/relationships" id="264" r:id="Rb505abc3e1f74982"/>
   </p:sldIdLst>
   <p:sldSz cx="12192000" cy="6858000"/>
   <p:notesSz cx="6858000" cy="9144000"/>
   <p:embeddedFontLst>
     <p:embeddedFont>
       <p:font typeface="JetBrains Mono"/>
-      <p:regular xmlns:r="http://schemas.openxmlformats.org/officeDocument/2006/relationships" r:id="R069a61a7c83a4a75"/>
+      <p:regular xmlns:r="http://schemas.openxmlformats.org/officeDocument/2006/relationships" r:id="Rafa5af177ad0408d"/>
     </p:embeddedFont>
   </p:embeddedFontLst>
 </p:presentation>
@@ -1071,7 +1071,7 @@
           <p:nvPr/>
         </p:nvPicPr>
         <p:blipFill rotWithShape="1">
-          <a:blip xmlns:r="http://schemas.openxmlformats.org/officeDocument/2006/relationships" xmlns:a="http://schemas.openxmlformats.org/drawingml/2006/main" r:embed="R717a92283aae4292"/>
+          <a:blip xmlns:r="http://schemas.openxmlformats.org/officeDocument/2006/relationships" xmlns:a="http://schemas.openxmlformats.org/drawingml/2006/main" r:embed="Rec1d4040461a4df2"/>
           <a:stretch xmlns:a="http://schemas.openxmlformats.org/drawingml/2006/main"/>
         </p:blipFill>
         <p:spPr>
@@ -1451,7 +1451,7 @@
           <p:nvPr/>
         </p:nvPicPr>
         <p:blipFill rotWithShape="1">
-          <a:blip xmlns:r="http://schemas.openxmlformats.org/officeDocument/2006/relationships" xmlns:a="http://schemas.openxmlformats.org/drawingml/2006/main" r:embed="R45a40abc52534663">
+          <a:blip xmlns:r="http://schemas.openxmlformats.org/officeDocument/2006/relationships" xmlns:a="http://schemas.openxmlformats.org/drawingml/2006/main" r:embed="R44223f666cc4479f">
             <a:alphaModFix amt="28000"/>
           </a:blip>
           <a:stretch xmlns:a="http://schemas.openxmlformats.org/drawingml/2006/main"/>
@@ -1664,7 +1664,7 @@
           <p:nvPr/>
         </p:nvPicPr>
         <p:blipFill rotWithShape="1">
-          <a:blip xmlns:r="http://schemas.openxmlformats.org/officeDocument/2006/relationships" xmlns:a="http://schemas.openxmlformats.org/drawingml/2006/main" r:embed="Re9ec53def0ce4594">
+          <a:blip xmlns:r="http://schemas.openxmlformats.org/officeDocument/2006/relationships" xmlns:a="http://schemas.openxmlformats.org/drawingml/2006/main" r:embed="Rb9746acda2d54782">
             <a:alphaModFix amt="28000"/>
           </a:blip>
           <a:stretch xmlns:a="http://schemas.openxmlformats.org/drawingml/2006/main"/>
@@ -1899,7 +1899,7 @@
           <p:nvPr/>
         </p:nvPicPr>
         <p:blipFill rotWithShape="1">
-          <a:blip xmlns:r="http://schemas.openxmlformats.org/officeDocument/2006/relationships" xmlns:a="http://schemas.openxmlformats.org/drawingml/2006/main" r:embed="R39fa6d50acff412f">
+          <a:blip xmlns:r="http://schemas.openxmlformats.org/officeDocument/2006/relationships" xmlns:a="http://schemas.openxmlformats.org/drawingml/2006/main" r:embed="Rf3e8bc5c04114d1f">
             <a:alphaModFix amt="28000"/>
           </a:blip>
           <a:stretch xmlns:a="http://schemas.openxmlformats.org/drawingml/2006/main"/>
@@ -2176,7 +2176,7 @@
           <p:nvPr/>
         </p:nvPicPr>
         <p:blipFill rotWithShape="1">
-          <a:blip xmlns:r="http://schemas.openxmlformats.org/officeDocument/2006/relationships" xmlns:a="http://schemas.openxmlformats.org/drawingml/2006/main" r:embed="R6d95df1917d94ea2">
+          <a:blip xmlns:r="http://schemas.openxmlformats.org/officeDocument/2006/relationships" xmlns:a="http://schemas.openxmlformats.org/drawingml/2006/main" r:embed="R1b7ac0128513430e">
             <a:alphaModFix amt="28000"/>
           </a:blip>
           <a:stretch xmlns:a="http://schemas.openxmlformats.org/drawingml/2006/main"/>
@@ -2451,7 +2451,7 @@
           <p:nvPr/>
         </p:nvPicPr>
         <p:blipFill rotWithShape="1">
-          <a:blip xmlns:r="http://schemas.openxmlformats.org/officeDocument/2006/relationships" xmlns:a="http://schemas.openxmlformats.org/drawingml/2006/main" r:embed="R714934dd3b6d464b">
+          <a:blip xmlns:r="http://schemas.openxmlformats.org/officeDocument/2006/relationships" xmlns:a="http://schemas.openxmlformats.org/drawingml/2006/main" r:embed="R617e79b3cbb74b37">
             <a:alphaModFix amt="28000"/>
           </a:blip>
           <a:stretch xmlns:a="http://schemas.openxmlformats.org/drawingml/2006/main"/>
@@ -2875,7 +2875,7 @@
           <p:nvPr/>
         </p:nvPicPr>
         <p:blipFill rotWithShape="1">
-          <a:blip xmlns:r="http://schemas.openxmlformats.org/officeDocument/2006/relationships" xmlns:a="http://schemas.openxmlformats.org/drawingml/2006/main" r:embed="R0e4f78c24f7b4c44">
+          <a:blip xmlns:r="http://schemas.openxmlformats.org/officeDocument/2006/relationships" xmlns:a="http://schemas.openxmlformats.org/drawingml/2006/main" r:embed="Rb42680a17bd9441b">
             <a:alphaModFix amt="28000"/>
           </a:blip>
           <a:stretch xmlns:a="http://schemas.openxmlformats.org/drawingml/2006/main"/>
@@ -3016,7 +3016,7 @@
           <p:nvPr/>
         </p:nvPicPr>
         <p:blipFill rotWithShape="1">
-          <a:blip xmlns:r="http://schemas.openxmlformats.org/officeDocument/2006/relationships" xmlns:a="http://schemas.openxmlformats.org/drawingml/2006/main" r:embed="R30b961b800c84027">
+          <a:blip xmlns:r="http://schemas.openxmlformats.org/officeDocument/2006/relationships" xmlns:a="http://schemas.openxmlformats.org/drawingml/2006/main" r:embed="R60dbba49d67c44bc">
             <a:alphaModFix amt="28000"/>
           </a:blip>
           <a:stretch xmlns:a="http://schemas.openxmlformats.org/drawingml/2006/main"/>
@@ -3130,7 +3130,7 @@
           <p:nvPr/>
         </p:nvPicPr>
         <p:blipFill rotWithShape="1">
-          <a:blip xmlns:r="http://schemas.openxmlformats.org/officeDocument/2006/relationships" xmlns:a="http://schemas.openxmlformats.org/drawingml/2006/main" r:embed="R9c0d04de2f4a411d">
+          <a:blip xmlns:r="http://schemas.openxmlformats.org/officeDocument/2006/relationships" xmlns:a="http://schemas.openxmlformats.org/drawingml/2006/main" r:embed="R8938ee172d994b98">
             <a:alphaModFix amt="28000"/>
           </a:blip>
           <a:stretch xmlns:a="http://schemas.openxmlformats.org/drawingml/2006/main"/>
@@ -3457,7 +3457,7 @@
           <p:nvPr/>
         </p:nvPicPr>
         <p:blipFill rotWithShape="1">
-          <a:blip xmlns:r="http://schemas.openxmlformats.org/officeDocument/2006/relationships" xmlns:a="http://schemas.openxmlformats.org/drawingml/2006/main" r:embed="Rf1f96d2580b14d1c">
+          <a:blip xmlns:r="http://schemas.openxmlformats.org/officeDocument/2006/relationships" xmlns:a="http://schemas.openxmlformats.org/drawingml/2006/main" r:embed="R76de7d6683df4ef8">
             <a:alphaModFix amt="28000"/>
           </a:blip>
           <a:stretch xmlns:a="http://schemas.openxmlformats.org/drawingml/2006/main"/>
@@ -3745,7 +3745,7 @@
           <p:nvPr/>
         </p:nvPicPr>
         <p:blipFill rotWithShape="1">
-          <a:blip xmlns:r="http://schemas.openxmlformats.org/officeDocument/2006/relationships" xmlns:a="http://schemas.openxmlformats.org/drawingml/2006/main" r:embed="Rca2ef9c22b2846a1">
+          <a:blip xmlns:r="http://schemas.openxmlformats.org/officeDocument/2006/relationships" xmlns:a="http://schemas.openxmlformats.org/drawingml/2006/main" r:embed="Re4789e868a1846af">
             <a:alphaModFix amt="28000"/>
           </a:blip>
           <a:stretch xmlns:a="http://schemas.openxmlformats.org/drawingml/2006/main"/>
@@ -3982,17 +3982,17 @@
   </p:cSld>
   <p:clrMap bg1="lt1" tx1="dk1" bg2="lt2" tx2="dk2" accent1="accent1" accent2="accent2" accent3="accent3" accent4="accent4" accent5="accent5" accent6="accent6" hlink="hlink" folHlink="folHlink"/>
   <p:sldLayoutIdLst>
-    <p:sldLayoutId xmlns:r="http://schemas.openxmlformats.org/officeDocument/2006/relationships" id="2147483649" r:id="Rf9d105bf92824215"/>
-    <p:sldLayoutId xmlns:r="http://schemas.openxmlformats.org/officeDocument/2006/relationships" id="2147483650" r:id="R24f319430c0745ae"/>
-    <p:sldLayoutId xmlns:r="http://schemas.openxmlformats.org/officeDocument/2006/relationships" id="2147483651" r:id="R4d099d1328db4560"/>
-    <p:sldLayoutId xmlns:r="http://schemas.openxmlformats.org/officeDocument/2006/relationships" id="2147483652" r:id="R00f1a7e4fa93403a"/>
-    <p:sldLayoutId xmlns:r="http://schemas.openxmlformats.org/officeDocument/2006/relationships" id="2147483653" r:id="R0d0ca76cf37046d9"/>
-    <p:sldLayoutId xmlns:r="http://schemas.openxmlformats.org/officeDocument/2006/relationships" id="2147483654" r:id="R72c1fc3129484563"/>
-    <p:sldLayoutId xmlns:r="http://schemas.openxmlformats.org/officeDocument/2006/relationships" id="2147483655" r:id="R279e3a9a46df47cb"/>
-    <p:sldLayoutId xmlns:r="http://schemas.openxmlformats.org/officeDocument/2006/relationships" id="2147483656" r:id="R66a2d2e9359f4cab"/>
-    <p:sldLayoutId xmlns:r="http://schemas.openxmlformats.org/officeDocument/2006/relationships" id="2147483657" r:id="R1a2763eef09b42a7"/>
-    <p:sldLayoutId xmlns:r="http://schemas.openxmlformats.org/officeDocument/2006/relationships" id="2147483658" r:id="Rb66ef8855cdb4240"/>
-    <p:sldLayoutId xmlns:r="http://schemas.openxmlformats.org/officeDocument/2006/relationships" id="2147483659" r:id="R282268514543446a"/>
+    <p:sldLayoutId xmlns:r="http://schemas.openxmlformats.org/officeDocument/2006/relationships" id="2147483649" r:id="Rb1637ef671eb4ffe"/>
+    <p:sldLayoutId xmlns:r="http://schemas.openxmlformats.org/officeDocument/2006/relationships" id="2147483650" r:id="R3e46808e1cef40f1"/>
+    <p:sldLayoutId xmlns:r="http://schemas.openxmlformats.org/officeDocument/2006/relationships" id="2147483651" r:id="R82ce9f9b55014e3e"/>
+    <p:sldLayoutId xmlns:r="http://schemas.openxmlformats.org/officeDocument/2006/relationships" id="2147483652" r:id="Re85ef61883c34aca"/>
+    <p:sldLayoutId xmlns:r="http://schemas.openxmlformats.org/officeDocument/2006/relationships" id="2147483653" r:id="R2035ac21c58e459f"/>
+    <p:sldLayoutId xmlns:r="http://schemas.openxmlformats.org/officeDocument/2006/relationships" id="2147483654" r:id="R38fb60ad596a44b0"/>
+    <p:sldLayoutId xmlns:r="http://schemas.openxmlformats.org/officeDocument/2006/relationships" id="2147483655" r:id="Rf6e307b397ba4ebb"/>
+    <p:sldLayoutId xmlns:r="http://schemas.openxmlformats.org/officeDocument/2006/relationships" id="2147483656" r:id="R8c43d726514442c1"/>
+    <p:sldLayoutId xmlns:r="http://schemas.openxmlformats.org/officeDocument/2006/relationships" id="2147483657" r:id="R5e24df77788b4c8e"/>
+    <p:sldLayoutId xmlns:r="http://schemas.openxmlformats.org/officeDocument/2006/relationships" id="2147483658" r:id="Rcaa185eb50394b2c"/>
+    <p:sldLayoutId xmlns:r="http://schemas.openxmlformats.org/officeDocument/2006/relationships" id="2147483659" r:id="Rdc0435ed6e9a41da"/>
   </p:sldLayoutIdLst>
   <p:hf hdr="0" ftr="0" dt="0"/>
   <p:txStyles>
@@ -4947,24 +4947,13 @@
             <a:r>
               <a:rPr sz="2400">
                 <a:solidFill>
-                  <a:srgbClr val="080808"/>
-                </a:solidFill>
-                <a:latin typeface="JetBrains Mono"/>
-                <a:ea typeface="JetBrains Mono"/>
-                <a:cs typeface="JetBrains Mono"/>
-              </a:rPr>
-              <a:t>    </a:t>
-            </a:r>
-            <a:r>
-              <a:rPr sz="2400">
-                <a:solidFill>
                   <a:srgbClr val="C45E00"/>
                 </a:solidFill>
                 <a:latin typeface="JetBrains Mono"/>
                 <a:ea typeface="JetBrains Mono"/>
                 <a:cs typeface="JetBrains Mono"/>
               </a:rPr>
-              <a:t>return</a:t>
+              <a:t>    return</a:t>
             </a:r>
             <a:r>
               <a:rPr sz="2400">
@@ -5366,24 +5355,13 @@
             <a:r>
               <a:rPr sz="2400">
                 <a:solidFill>
-                  <a:srgbClr val="080808"/>
-                </a:solidFill>
-                <a:latin typeface="JetBrains Mono"/>
-                <a:ea typeface="JetBrains Mono"/>
-                <a:cs typeface="JetBrains Mono"/>
-              </a:rPr>
-              <a:t>    </a:t>
-            </a:r>
-            <a:r>
-              <a:rPr sz="2400">
-                <a:solidFill>
                   <a:srgbClr val="C45E00"/>
                 </a:solidFill>
                 <a:latin typeface="JetBrains Mono"/>
                 <a:ea typeface="JetBrains Mono"/>
                 <a:cs typeface="JetBrains Mono"/>
               </a:rPr>
-              <a:t>return</a:t>
+              <a:t>    return</a:t>
             </a:r>
             <a:r>
               <a:rPr sz="2400">
@@ -5785,24 +5763,13 @@
             <a:r>
               <a:rPr sz="2400">
                 <a:solidFill>
-                  <a:srgbClr val="080808"/>
-                </a:solidFill>
-                <a:latin typeface="JetBrains Mono"/>
-                <a:ea typeface="JetBrains Mono"/>
-                <a:cs typeface="JetBrains Mono"/>
-              </a:rPr>
-              <a:t>    </a:t>
-            </a:r>
-            <a:r>
-              <a:rPr sz="2400">
-                <a:solidFill>
                   <a:srgbClr val="C45E00"/>
                 </a:solidFill>
                 <a:latin typeface="JetBrains Mono"/>
                 <a:ea typeface="JetBrains Mono"/>
                 <a:cs typeface="JetBrains Mono"/>
               </a:rPr>
-              <a:t>return</a:t>
+              <a:t>    return</a:t>
             </a:r>
             <a:r>
               <a:rPr sz="2400">
@@ -6459,24 +6426,13 @@
             <a:r>
               <a:rPr sz="1600">
                 <a:solidFill>
-                  <a:srgbClr val="080808"/>
-                </a:solidFill>
-                <a:latin typeface="JetBrains Mono"/>
-                <a:ea typeface="JetBrains Mono"/>
-                <a:cs typeface="JetBrains Mono"/>
-              </a:rPr>
-              <a:t>    </a:t>
-            </a:r>
-            <a:r>
-              <a:rPr sz="1600">
-                <a:solidFill>
                   <a:srgbClr val="C45E00"/>
                 </a:solidFill>
                 <a:latin typeface="JetBrains Mono"/>
                 <a:ea typeface="JetBrains Mono"/>
                 <a:cs typeface="JetBrains Mono"/>
               </a:rPr>
-              <a:t>return</a:t>
+              <a:t>    return</a:t>
             </a:r>
             <a:r>
               <a:rPr sz="1600">
@@ -7040,24 +6996,13 @@
             <a:r>
               <a:rPr sz="1600">
                 <a:solidFill>
-                  <a:srgbClr val="080808"/>
-                </a:solidFill>
-                <a:latin typeface="JetBrains Mono"/>
-                <a:ea typeface="JetBrains Mono"/>
-                <a:cs typeface="JetBrains Mono"/>
-              </a:rPr>
-              <a:t>    </a:t>
-            </a:r>
-            <a:r>
-              <a:rPr sz="1600">
-                <a:solidFill>
                   <a:srgbClr val="C45E00"/>
                 </a:solidFill>
                 <a:latin typeface="JetBrains Mono"/>
                 <a:ea typeface="JetBrains Mono"/>
                 <a:cs typeface="JetBrains Mono"/>
               </a:rPr>
-              <a:t>return</a:t>
+              <a:t>    return</a:t>
             </a:r>
             <a:r>
               <a:rPr sz="1600">
@@ -7665,24 +7610,13 @@
             <a:r>
               <a:rPr sz="1600">
                 <a:solidFill>
-                  <a:srgbClr val="080808"/>
-                </a:solidFill>
-                <a:latin typeface="JetBrains Mono"/>
-                <a:ea typeface="JetBrains Mono"/>
-                <a:cs typeface="JetBrains Mono"/>
-              </a:rPr>
-              <a:t>    </a:t>
-            </a:r>
-            <a:r>
-              <a:rPr sz="1600">
-                <a:solidFill>
                   <a:srgbClr val="C45E00"/>
                 </a:solidFill>
                 <a:latin typeface="JetBrains Mono"/>
                 <a:ea typeface="JetBrains Mono"/>
                 <a:cs typeface="JetBrains Mono"/>
               </a:rPr>
-              <a:t>return</a:t>
+              <a:t>    return</a:t>
             </a:r>
             <a:r>
               <a:rPr sz="1600">
@@ -8290,24 +8224,13 @@
             <a:r>
               <a:rPr sz="1600">
                 <a:solidFill>
-                  <a:srgbClr val="080808"/>
-                </a:solidFill>
-                <a:latin typeface="JetBrains Mono"/>
-                <a:ea typeface="JetBrains Mono"/>
-                <a:cs typeface="JetBrains Mono"/>
-              </a:rPr>
-              <a:t>    </a:t>
-            </a:r>
-            <a:r>
-              <a:rPr sz="1600">
-                <a:solidFill>
                   <a:srgbClr val="C45E00"/>
                 </a:solidFill>
                 <a:latin typeface="JetBrains Mono"/>
                 <a:ea typeface="JetBrains Mono"/>
                 <a:cs typeface="JetBrains Mono"/>
               </a:rPr>
-              <a:t>return</a:t>
+              <a:t>    return</a:t>
             </a:r>
             <a:r>
               <a:rPr sz="1600">
@@ -8559,24 +8482,13 @@
             <a:r>
               <a:rPr sz="1800">
                 <a:solidFill>
-                  <a:srgbClr val="080808"/>
-                </a:solidFill>
-                <a:latin typeface="JetBrains Mono"/>
-                <a:ea typeface="JetBrains Mono"/>
-                <a:cs typeface="JetBrains Mono"/>
-              </a:rPr>
-              <a:t>    </a:t>
-            </a:r>
-            <a:r>
-              <a:rPr sz="1800">
-                <a:solidFill>
                   <a:srgbClr val="C45E00"/>
                 </a:solidFill>
                 <a:latin typeface="JetBrains Mono"/>
                 <a:ea typeface="JetBrains Mono"/>
                 <a:cs typeface="JetBrains Mono"/>
               </a:rPr>
-              <a:t>return</a:t>
+              <a:t>    return</a:t>
             </a:r>
             <a:r>
               <a:rPr sz="1800">
